--- a/content/W01/D4/slides/C2_W01_D04_half1_STUDENT.pptx
+++ b/content/W01/D4/slides/C2_W01_D04_half1_STUDENT.pptx
@@ -4758,14 +4758,14 @@
       </p:sp>
       <p:pic>
         <p:nvPicPr>
-          <p:cNvPr id="6" name="Picture 5" descr="a8d675305ba947db.png"/>
+          <p:cNvPr id="6" name="Picture 5" descr="989b7f1d11f17f83.png"/>
           <p:cNvPicPr>
             <a:picLocks noChangeAspect="1"/>
           </p:cNvPicPr>
           <p:nvPr/>
         </p:nvPicPr>
         <p:blipFill>
-          <a:blip r:embed="rId2"/>
+          <a:blip r:embed="rId3"/>
           <a:stretch>
             <a:fillRect/>
           </a:stretch>
@@ -5127,14 +5127,14 @@
       </p:sp>
       <p:pic>
         <p:nvPicPr>
-          <p:cNvPr id="6" name="Picture 5" descr="2d4855402df086f2.png"/>
+          <p:cNvPr id="6" name="Picture 5" descr="2a4b354aeb0e86fe.png"/>
           <p:cNvPicPr>
             <a:picLocks noChangeAspect="1"/>
           </p:cNvPicPr>
           <p:nvPr/>
         </p:nvPicPr>
         <p:blipFill>
-          <a:blip r:embed="rId2"/>
+          <a:blip r:embed="rId3"/>
           <a:stretch>
             <a:fillRect/>
           </a:stretch>
@@ -6832,14 +6832,14 @@
       </p:sp>
       <p:pic>
         <p:nvPicPr>
-          <p:cNvPr id="6" name="Picture 5" descr="fb89326eeb78fbdc.png"/>
+          <p:cNvPr id="6" name="Picture 5" descr="4d96c3b5d17de1cb.png"/>
           <p:cNvPicPr>
             <a:picLocks noChangeAspect="1"/>
           </p:cNvPicPr>
           <p:nvPr/>
         </p:nvPicPr>
         <p:blipFill>
-          <a:blip r:embed="rId2"/>
+          <a:blip r:embed="rId3"/>
           <a:stretch>
             <a:fillRect/>
           </a:stretch>
@@ -10450,14 +10450,14 @@
       </p:sp>
       <p:pic>
         <p:nvPicPr>
-          <p:cNvPr id="6" name="Picture 5" descr="d48b2af27919e314.png"/>
+          <p:cNvPr id="6" name="Picture 5" descr="4ffdcd671a091181.png"/>
           <p:cNvPicPr>
             <a:picLocks noChangeAspect="1"/>
           </p:cNvPicPr>
           <p:nvPr/>
         </p:nvPicPr>
         <p:blipFill>
-          <a:blip r:embed="rId2"/>
+          <a:blip r:embed="rId3"/>
           <a:stretch>
             <a:fillRect/>
           </a:stretch>
@@ -11323,14 +11323,14 @@
       </p:sp>
       <p:pic>
         <p:nvPicPr>
-          <p:cNvPr id="6" name="Picture 5" descr="092ee9b3cb1d29f8.png"/>
+          <p:cNvPr id="6" name="Picture 5" descr="a5447f5a168a1252.png"/>
           <p:cNvPicPr>
             <a:picLocks noChangeAspect="1"/>
           </p:cNvPicPr>
           <p:nvPr/>
         </p:nvPicPr>
         <p:blipFill>
-          <a:blip r:embed="rId2"/>
+          <a:blip r:embed="rId3"/>
           <a:stretch>
             <a:fillRect/>
           </a:stretch>

--- a/content/W01/D4/slides/C2_W01_D04_half1_STUDENT.pptx
+++ b/content/W01/D4/slides/C2_W01_D04_half1_STUDENT.pptx
@@ -4758,7 +4758,7 @@
       </p:sp>
       <p:pic>
         <p:nvPicPr>
-          <p:cNvPr id="6" name="Picture 5" descr="989b7f1d11f17f83.png"/>
+          <p:cNvPr id="6" name="Picture 5" descr="53b15185477071bd.png"/>
           <p:cNvPicPr>
             <a:picLocks noChangeAspect="1"/>
           </p:cNvPicPr>
@@ -4772,8 +4772,8 @@
         </p:blipFill>
         <p:spPr>
           <a:xfrm>
-            <a:off x="685800" y="2375039"/>
-            <a:ext cx="10820095" cy="1874242"/>
+            <a:off x="685800" y="2346569"/>
+            <a:ext cx="10820095" cy="1931181"/>
           </a:xfrm>
           <a:prstGeom prst="rect">
             <a:avLst/>
@@ -4788,7 +4788,7 @@
         </p:nvSpPr>
         <p:spPr>
           <a:xfrm>
-            <a:off x="685800" y="4395585"/>
+            <a:off x="685800" y="4424054"/>
             <a:ext cx="10820095" cy="910336"/>
           </a:xfrm>
           <a:prstGeom prst="rect">
@@ -5127,7 +5127,7 @@
       </p:sp>
       <p:pic>
         <p:nvPicPr>
-          <p:cNvPr id="6" name="Picture 5" descr="2a4b354aeb0e86fe.png"/>
+          <p:cNvPr id="6" name="Picture 5" descr="c0bfb54f47b68876.png"/>
           <p:cNvPicPr>
             <a:picLocks noChangeAspect="1"/>
           </p:cNvPicPr>
@@ -5142,7 +5142,7 @@
         <p:spPr>
           <a:xfrm>
             <a:off x="685800" y="1627632"/>
-            <a:ext cx="10820095" cy="2011531"/>
+            <a:ext cx="10820095" cy="1783717"/>
           </a:xfrm>
           <a:prstGeom prst="rect">
             <a:avLst/>
@@ -5158,7 +5158,7 @@
           <p:nvPr/>
         </p:nvGraphicFramePr>
         <p:xfrm>
-          <a:off x="685800" y="3785467"/>
+          <a:off x="685800" y="3557653"/>
           <a:ext cx="10820094" cy="1272032"/>
         </p:xfrm>
         <a:graphic>
@@ -5367,7 +5367,7 @@
         </p:nvSpPr>
         <p:spPr>
           <a:xfrm>
-            <a:off x="685800" y="5313531"/>
+            <a:off x="685800" y="5085717"/>
             <a:ext cx="10820095" cy="478536"/>
           </a:xfrm>
           <a:prstGeom prst="rect">
@@ -6832,7 +6832,7 @@
       </p:sp>
       <p:pic>
         <p:nvPicPr>
-          <p:cNvPr id="6" name="Picture 5" descr="4d96c3b5d17de1cb.png"/>
+          <p:cNvPr id="6" name="Picture 5" descr="c9e5ff3ee6f3f901.png"/>
           <p:cNvPicPr>
             <a:picLocks noChangeAspect="1"/>
           </p:cNvPicPr>
@@ -6846,8 +6846,8 @@
         </p:blipFill>
         <p:spPr>
           <a:xfrm>
-            <a:off x="685800" y="2918796"/>
-            <a:ext cx="10820095" cy="1132168"/>
+            <a:off x="685800" y="2867259"/>
+            <a:ext cx="10820095" cy="1235242"/>
           </a:xfrm>
           <a:prstGeom prst="rect">
             <a:avLst/>
@@ -6862,7 +6862,7 @@
         </p:nvSpPr>
         <p:spPr>
           <a:xfrm>
-            <a:off x="685800" y="4197268"/>
+            <a:off x="685800" y="4248805"/>
             <a:ext cx="10820095" cy="564896"/>
           </a:xfrm>
           <a:prstGeom prst="rect">
@@ -11323,7 +11323,7 @@
       </p:sp>
       <p:pic>
         <p:nvPicPr>
-          <p:cNvPr id="6" name="Picture 5" descr="a5447f5a168a1252.png"/>
+          <p:cNvPr id="6" name="Picture 5" descr="6c068a46e14851e8.png"/>
           <p:cNvPicPr>
             <a:picLocks noChangeAspect="1"/>
           </p:cNvPicPr>
@@ -11337,8 +11337,8 @@
         </p:blipFill>
         <p:spPr>
           <a:xfrm>
-            <a:off x="685800" y="2958533"/>
-            <a:ext cx="10820095" cy="1052693"/>
+            <a:off x="685800" y="2814984"/>
+            <a:ext cx="10820095" cy="1339792"/>
           </a:xfrm>
           <a:prstGeom prst="rect">
             <a:avLst/>
@@ -11353,7 +11353,7 @@
         </p:nvSpPr>
         <p:spPr>
           <a:xfrm>
-            <a:off x="685800" y="4157530"/>
+            <a:off x="685800" y="4301080"/>
             <a:ext cx="10820095" cy="564896"/>
           </a:xfrm>
           <a:prstGeom prst="rect">

--- a/content/W01/D4/slides/C2_W01_D04_half1_STUDENT.pptx
+++ b/content/W01/D4/slides/C2_W01_D04_half1_STUDENT.pptx
@@ -2005,7 +2005,12 @@
           </a:p>
           <a:p>
             <a:r>
-              <a:t>off the chart. It is "significant" and still worthless. Size is a separate measurement.</a:t>
+              <a:t>off the chart. Five rupees on an order of about Rs 2,200 is a quarter of one percent: "significant",</a:t>
+            </a:r>
+          </a:p>
+          <a:p>
+            <a:r>
+              <a:t>and whether it is worth anything depends on what acting costs. Size is a separate measurement.</a:t>
             </a:r>
           </a:p>
         </p:txBody>

--- a/content/W01/D4/slides/C2_W01_D04_half1_STUDENT.pptx
+++ b/content/W01/D4/slides/C2_W01_D04_half1_STUDENT.pptx
@@ -1130,17 +1130,22 @@
           <a:lstStyle/>
           <a:p>
             <a:r>
-              <a:t>LIVE, 3 minutes. Put the sentence up and ask who would have written it. Most hands go up; it is the</a:t>
-            </a:r>
-          </a:p>
-          <a:p>
-            <a:r>
-              <a:t>most common p-value sentence in industry and it appears in the row's list of what the room must</a:t>
-            </a:r>
-          </a:p>
-          <a:p>
-            <a:r>
-              <a:t>handle. Do not correct it yet; the next slide does.</a:t>
+              <a:t>LIVE, 8 minutes. The room runs level 4 of notebook 1 and writes a first-draft sentence without help.</a:t>
+            </a:r>
+          </a:p>
+          <a:p>
+            <a:r>
+              <a:t>Do not read a number out first; every laptop gets the same share because of the seed. When most</a:t>
+            </a:r>
+          </a:p>
+          <a:p>
+            <a:r>
+              <a:t>laptops show a share, ask one pair to read theirs aloud and write it on the board. That number is</a:t>
+            </a:r>
+          </a:p>
+          <a:p>
+            <a:r>
+              <a:t>the one the next three slides work on, and it belongs to the room.</a:t>
             </a:r>
           </a:p>
         </p:txBody>
@@ -1210,17 +1215,17 @@
           <a:lstStyle/>
           <a:p>
             <a:r>
-              <a:t>LIVE, 3 minutes. The chance that a finding is wrong depends on things the shuffle never saw: how</a:t>
-            </a:r>
-          </a:p>
-          <a:p>
-            <a:r>
-              <a:t>plausible a drop was before the data, what else changed, how many segments were tested. Name that</a:t>
-            </a:r>
-          </a:p>
-          <a:p>
-            <a:r>
-              <a:t>in one line and stop; it is a later week's topic.</a:t>
+              <a:t>LIVE, 3 minutes. Put the sentence up next to the room's share on the board and ask whose first</a:t>
+            </a:r>
+          </a:p>
+          <a:p>
+            <a:r>
+              <a:t>draft looks like it. Most hands go up; it is the most common p-value sentence in industry and it</a:t>
+            </a:r>
+          </a:p>
+          <a:p>
+            <a:r>
+              <a:t>appears in the row's list of what the room must handle. Do not correct it yet; the next slide does.</a:t>
             </a:r>
           </a:p>
         </p:txBody>
@@ -1290,12 +1295,17 @@
           <a:lstStyle/>
           <a:p>
             <a:r>
-              <a:t>LIVE, 2 minutes. The rewritten column is what Kavya signs. The third row hands over to round two:</a:t>
-            </a:r>
-          </a:p>
-          <a:p>
-            <a:r>
-              <a:t>real is one call, worth acting on is another.</a:t>
+              <a:t>LIVE, 3 minutes. The chance that a finding is wrong depends on things the shuffle never saw: how</a:t>
+            </a:r>
+          </a:p>
+          <a:p>
+            <a:r>
+              <a:t>plausible a drop was before the data, what else changed, how many segments were tested. Name that</a:t>
+            </a:r>
+          </a:p>
+          <a:p>
+            <a:r>
+              <a:t>in one line and stop; it is a later week's topic.</a:t>
             </a:r>
           </a:p>
         </p:txBody>
@@ -1365,22 +1375,22 @@
           <a:lstStyle/>
           <a:p>
             <a:r>
-              <a:t>LIVE, 10 minutes. The room runs level 4 of notebook 1 and writes the sentence. Do not read a</a:t>
-            </a:r>
-          </a:p>
-          <a:p>
-            <a:r>
-              <a:t>number out first; every laptop gets the same share because of the seed. Collect three sentences</a:t>
-            </a:r>
-          </a:p>
-          <a:p>
-            <a:r>
-              <a:t>aloud and have the room vote each one defensible or wrong. The share they find is the round's</a:t>
-            </a:r>
-          </a:p>
-          <a:p>
-            <a:r>
-              <a:t>answer and belongs to them.</a:t>
+              <a:t>LIVE, 4 minutes. Each pair rewrites its first draft in the rewritten form and reads it to the</a:t>
+            </a:r>
+          </a:p>
+          <a:p>
+            <a:r>
+              <a:t>partner. Collect three sentences aloud and have the room vote each one defensible or wrong. The</a:t>
+            </a:r>
+          </a:p>
+          <a:p>
+            <a:r>
+              <a:t>rewritten column is what Kavya signs. The third row hands over to round two: real is one call,</a:t>
+            </a:r>
+          </a:p>
+          <a:p>
+            <a:r>
+              <a:t>worth acting on is another.</a:t>
             </a:r>
           </a:p>
         </p:txBody>
@@ -2160,12 +2170,17 @@
           <a:lstStyle/>
           <a:p>
             <a:r>
-              <a:t>LIVE, 3 minutes. Delivered revenue in Q2 was Rs 1,28,64,680, of which Business delivered</a:t>
-            </a:r>
-          </a:p>
-          <a:p>
-            <a:r>
-              <a:t>Rs 1,27,64,460. The room computed these on Tuesday and Wednesday. Do not state the Retail-Plus gap</a:t>
+              <a:t>LIVE, 3 minutes. The chart draws the consumer segments alone so their bars stand in proportion; a</a:t>
+            </a:r>
+          </a:p>
+          <a:p>
+            <a:r>
+              <a:t>single axis with Business on it would flatten all three to the floor. Delivered revenue in Q2 was</a:t>
+            </a:r>
+          </a:p>
+          <a:p>
+            <a:r>
+              <a:t>Rs 1,28,64,680, of which Business delivered Rs 1,27,64,460. The room computed these on Tuesday and Wednesday. Do not state the Retail-Plus gap</a:t>
             </a:r>
           </a:p>
           <a:p>
@@ -3880,12 +3895,12 @@
           </a:p>
           <a:p>
             <a:r>
-              <a:t>in code and the Retail-Core demonstration (13), the trap (8), the room's Retail-Plus run (10), and</a:t>
-            </a:r>
-          </a:p>
-          <a:p>
-            <a:r>
-              <a:t>Kavya's review (2). Notebook 1 runs beside it.</a:t>
+              <a:t>in code and the Retail-Core demonstration (13), the room's Retail-Plus run (8), the trap staged on</a:t>
+            </a:r>
+          </a:p>
+          <a:p>
+            <a:r>
+              <a:t>the room's own share and its fix (10), and Kavya's review (2). Notebook 1 runs beside it.</a:t>
             </a:r>
           </a:p>
         </p:txBody>
@@ -13274,7 +13289,7 @@
                 </a:solidFill>
                 <a:latin typeface="Georgia"/>
               </a:rPr>
-              <a:t>The plausible wrong answer</a:t>
+              <a:t>Your turn: Retail-Plus, 5,000 shuffles</a:t>
             </a:r>
           </a:p>
         </p:txBody>
@@ -13309,45 +13324,144 @@
                 </a:solidFill>
                 <a:latin typeface="Calibri"/>
               </a:rPr>
-              <a:t>A draft note, written in a hurry after a shuffle test came back at 0.03.</a:t>
-            </a:r>
-          </a:p>
-        </p:txBody>
-      </p:sp>
-      <p:pic>
-        <p:nvPicPr>
-          <p:cNvPr id="9" name="mermaid diagram" descr="e3c7a847657e72e7.png"/>
-          <p:cNvPicPr>
-            <a:picLocks noChangeAspect="1"/>
-          </p:cNvPicPr>
-          <p:nvPr/>
-        </p:nvPicPr>
-        <p:blipFill>
-          <a:blip r:embed="rId6"/>
-          <a:stretch>
-            <a:fillRect/>
-          </a:stretch>
-        </p:blipFill>
-        <p:spPr>
-          <a:xfrm>
-            <a:off x="2166785" y="1956816"/>
-            <a:ext cx="7858125" cy="1128712"/>
-          </a:xfrm>
-          <a:prstGeom prst="rect">
-            <a:avLst/>
-          </a:prstGeom>
-        </p:spPr>
-      </p:pic>
-      <p:sp>
-        <p:nvSpPr>
-          <p:cNvPr id="10" name="Rounded Rectangle 9"/>
+              <a:t>The same loop on the segment Meera asked about, run by the room before anyone says a number.</a:t>
+            </a:r>
+          </a:p>
+        </p:txBody>
+      </p:sp>
+      <p:sp>
+        <p:nvSpPr>
+          <p:cNvPr id="9" name="Rectangle 8"/>
           <p:cNvSpPr/>
           <p:nvPr/>
         </p:nvSpPr>
         <p:spPr>
           <a:xfrm>
-            <a:off x="530352" y="3231832"/>
-            <a:ext cx="11130991" cy="1121664"/>
+            <a:off x="1853145" y="2523744"/>
+            <a:ext cx="8485403" cy="18288"/>
+          </a:xfrm>
+          <a:prstGeom prst="rect">
+            <a:avLst/>
+          </a:prstGeom>
+          <a:solidFill>
+            <a:srgbClr val="CFC9EE"/>
+          </a:solidFill>
+          <a:ln>
+            <a:noFill/>
+          </a:ln>
+          <a:effectLst/>
+        </p:spPr>
+        <p:style>
+          <a:lnRef idx="1">
+            <a:schemeClr val="accent1"/>
+          </a:lnRef>
+          <a:fillRef idx="3">
+            <a:schemeClr val="accent1"/>
+          </a:fillRef>
+          <a:effectRef idx="2">
+            <a:schemeClr val="accent1"/>
+          </a:effectRef>
+          <a:fontRef idx="minor">
+            <a:schemeClr val="lt1"/>
+          </a:fontRef>
+        </p:style>
+        <p:txBody>
+          <a:bodyPr rtlCol="0" anchor="ctr" wrap="square"/>
+          <a:lstStyle/>
+          <a:p>
+            <a:pPr algn="ctr"/>
+          </a:p>
+        </p:txBody>
+      </p:sp>
+      <p:sp>
+        <p:nvSpPr>
+          <p:cNvPr id="10" name="TextBox 9"/>
+          <p:cNvSpPr txBox="1"/>
+          <p:nvPr/>
+        </p:nvSpPr>
+        <p:spPr>
+          <a:xfrm>
+            <a:off x="530352" y="1956816"/>
+            <a:ext cx="2645587" cy="168656"/>
+          </a:xfrm>
+          <a:prstGeom prst="rect">
+            <a:avLst/>
+          </a:prstGeom>
+          <a:noFill/>
+        </p:spPr>
+        <p:txBody>
+          <a:bodyPr wrap="square" anchor="t" lIns="0" rIns="0" tIns="0" bIns="0">
+            <a:spAutoFit/>
+          </a:bodyPr>
+          <a:lstStyle/>
+          <a:p>
+            <a:pPr algn="ctr"/>
+            <a:r>
+              <a:rPr sz="800" b="1" i="0" spc="250">
+                <a:solidFill>
+                  <a:srgbClr val="5B3FD6"/>
+                </a:solidFill>
+                <a:latin typeface="Calibri"/>
+              </a:rPr>
+              <a:t>STEP 1</a:t>
+            </a:r>
+          </a:p>
+        </p:txBody>
+      </p:sp>
+      <p:sp>
+        <p:nvSpPr>
+          <p:cNvPr id="11" name="Oval 10"/>
+          <p:cNvSpPr/>
+          <p:nvPr/>
+        </p:nvSpPr>
+        <p:spPr>
+          <a:xfrm>
+            <a:off x="1752561" y="2432304"/>
+            <a:ext cx="201168" cy="201168"/>
+          </a:xfrm>
+          <a:prstGeom prst="ellipse">
+            <a:avLst/>
+          </a:prstGeom>
+          <a:solidFill>
+            <a:srgbClr val="5B3FD6"/>
+          </a:solidFill>
+          <a:ln>
+            <a:noFill/>
+          </a:ln>
+          <a:effectLst/>
+        </p:spPr>
+        <p:style>
+          <a:lnRef idx="1">
+            <a:schemeClr val="accent1"/>
+          </a:lnRef>
+          <a:fillRef idx="3">
+            <a:schemeClr val="accent1"/>
+          </a:fillRef>
+          <a:effectRef idx="2">
+            <a:schemeClr val="accent1"/>
+          </a:effectRef>
+          <a:fontRef idx="minor">
+            <a:schemeClr val="lt1"/>
+          </a:fontRef>
+        </p:style>
+        <p:txBody>
+          <a:bodyPr rtlCol="0" anchor="ctr" wrap="square"/>
+          <a:lstStyle/>
+          <a:p>
+            <a:pPr algn="ctr"/>
+          </a:p>
+        </p:txBody>
+      </p:sp>
+      <p:sp>
+        <p:nvSpPr>
+          <p:cNvPr id="12" name="Rounded Rectangle 11"/>
+          <p:cNvSpPr/>
+          <p:nvPr/>
+        </p:nvSpPr>
+        <p:spPr>
+          <a:xfrm>
+            <a:off x="530352" y="2843784"/>
+            <a:ext cx="2645587" cy="1249680"/>
           </a:xfrm>
           <a:prstGeom prst="roundRect">
             <a:avLst>
@@ -13355,7 +13469,7 @@
             </a:avLst>
           </a:prstGeom>
           <a:solidFill>
-            <a:srgbClr val="F7F5FD"/>
+            <a:srgbClr val="FFFFFF"/>
           </a:solidFill>
           <a:ln w="9525">
             <a:solidFill>
@@ -13394,14 +13508,119 @@
       </p:sp>
       <p:sp>
         <p:nvSpPr>
-          <p:cNvPr id="11" name="Oval 10"/>
+          <p:cNvPr id="13" name="TextBox 12"/>
+          <p:cNvSpPr txBox="1"/>
+          <p:nvPr/>
+        </p:nvSpPr>
+        <p:spPr>
+          <a:xfrm>
+            <a:off x="694944" y="2990088"/>
+            <a:ext cx="2316403" cy="251205"/>
+          </a:xfrm>
+          <a:prstGeom prst="rect">
+            <a:avLst/>
+          </a:prstGeom>
+          <a:noFill/>
+        </p:spPr>
+        <p:txBody>
+          <a:bodyPr wrap="square" anchor="t" lIns="0" rIns="0" tIns="0" bIns="0">
+            <a:spAutoFit/>
+          </a:bodyPr>
+          <a:lstStyle/>
+          <a:p>
+            <a:pPr algn="l"/>
+            <a:r>
+              <a:rPr sz="1300" b="1" i="0">
+                <a:solidFill>
+                  <a:srgbClr val="1A0F5C"/>
+                </a:solidFill>
+                <a:latin typeface="Calibri"/>
+              </a:rPr>
+              <a:t>The measure</a:t>
+            </a:r>
+          </a:p>
+        </p:txBody>
+      </p:sp>
+      <p:sp>
+        <p:nvSpPr>
+          <p:cNvPr id="14" name="TextBox 13"/>
+          <p:cNvSpPr txBox="1"/>
+          <p:nvPr/>
+        </p:nvSpPr>
+        <p:spPr>
+          <a:xfrm>
+            <a:off x="694944" y="3277870"/>
+            <a:ext cx="2316403" cy="531876"/>
+          </a:xfrm>
+          <a:prstGeom prst="rect">
+            <a:avLst/>
+          </a:prstGeom>
+          <a:noFill/>
+        </p:spPr>
+        <p:txBody>
+          <a:bodyPr wrap="square" anchor="t" lIns="0" rIns="0" tIns="0" bIns="0">
+            <a:spAutoFit/>
+          </a:bodyPr>
+          <a:lstStyle/>
+          <a:p>
+            <a:pPr algn="l"/>
+            <a:r>
+              <a:rPr sz="1000" b="0" i="0">
+                <a:solidFill>
+                  <a:srgbClr val="6B6690"/>
+                </a:solidFill>
+                <a:latin typeface="Calibri"/>
+              </a:rPr>
+              <a:t>Delivered revenue per Retail-Plus member, Q1 and Q2, from notebook 1, level 4.</a:t>
+            </a:r>
+          </a:p>
+        </p:txBody>
+      </p:sp>
+      <p:sp>
+        <p:nvSpPr>
+          <p:cNvPr id="15" name="TextBox 14"/>
+          <p:cNvSpPr txBox="1"/>
+          <p:nvPr/>
+        </p:nvSpPr>
+        <p:spPr>
+          <a:xfrm>
+            <a:off x="3358819" y="1956816"/>
+            <a:ext cx="2645587" cy="168656"/>
+          </a:xfrm>
+          <a:prstGeom prst="rect">
+            <a:avLst/>
+          </a:prstGeom>
+          <a:noFill/>
+        </p:spPr>
+        <p:txBody>
+          <a:bodyPr wrap="square" anchor="t" lIns="0" rIns="0" tIns="0" bIns="0">
+            <a:spAutoFit/>
+          </a:bodyPr>
+          <a:lstStyle/>
+          <a:p>
+            <a:pPr algn="ctr"/>
+            <a:r>
+              <a:rPr sz="800" b="1" i="0" spc="250">
+                <a:solidFill>
+                  <a:srgbClr val="5B3FD6"/>
+                </a:solidFill>
+                <a:latin typeface="Calibri"/>
+              </a:rPr>
+              <a:t>STEP 2</a:t>
+            </a:r>
+          </a:p>
+        </p:txBody>
+      </p:sp>
+      <p:sp>
+        <p:nvSpPr>
+          <p:cNvPr id="16" name="Oval 15"/>
           <p:cNvSpPr/>
           <p:nvPr/>
         </p:nvSpPr>
         <p:spPr>
           <a:xfrm>
-            <a:off x="758952" y="3564064"/>
-            <a:ext cx="457200" cy="457200"/>
+            <a:off x="4581029" y="2432304"/>
+            <a:ext cx="201168" cy="201168"/>
           </a:xfrm>
           <a:prstGeom prst="ellipse">
             <a:avLst/>
@@ -13436,40 +13655,70 @@
           </a:p>
         </p:txBody>
       </p:sp>
-      <p:pic>
-        <p:nvPicPr>
-          <p:cNvPr id="12" name="Picture 11" descr="bug_39ada6eff46d.png"/>
-          <p:cNvPicPr>
-            <a:picLocks noChangeAspect="1"/>
-          </p:cNvPicPr>
-          <p:nvPr/>
-        </p:nvPicPr>
-        <p:blipFill>
-          <a:blip r:embed="rId5"/>
-          <a:stretch>
-            <a:fillRect/>
-          </a:stretch>
-        </p:blipFill>
-        <p:spPr>
-          <a:xfrm>
-            <a:off x="868680" y="3673792"/>
-            <a:ext cx="237744" cy="237744"/>
-          </a:xfrm>
-          <a:prstGeom prst="rect">
-            <a:avLst/>
-          </a:prstGeom>
-        </p:spPr>
-      </p:pic>
-      <p:sp>
-        <p:nvSpPr>
-          <p:cNvPr id="13" name="TextBox 12"/>
-          <p:cNvSpPr txBox="1"/>
-          <p:nvPr/>
-        </p:nvSpPr>
-        <p:spPr>
-          <a:xfrm>
-            <a:off x="1399031" y="3378136"/>
-            <a:ext cx="9987991" cy="160401"/>
+      <p:sp>
+        <p:nvSpPr>
+          <p:cNvPr id="17" name="Rounded Rectangle 16"/>
+          <p:cNvSpPr/>
+          <p:nvPr/>
+        </p:nvSpPr>
+        <p:spPr>
+          <a:xfrm>
+            <a:off x="3358819" y="2843784"/>
+            <a:ext cx="2645587" cy="1249680"/>
+          </a:xfrm>
+          <a:prstGeom prst="roundRect">
+            <a:avLst>
+              <a:gd name="adj" fmla="val 5000"/>
+            </a:avLst>
+          </a:prstGeom>
+          <a:solidFill>
+            <a:srgbClr val="FFFFFF"/>
+          </a:solidFill>
+          <a:ln w="9525">
+            <a:solidFill>
+              <a:srgbClr val="E4E1F1"/>
+            </a:solidFill>
+          </a:ln>
+          <a:effectLst>
+            <a:outerShdw blurRad="76200" dist="19050" dir="5400000" algn="bl" rotWithShape="0">
+              <a:srgbClr val="1A0F5C">
+                <a:alpha val="12000"/>
+              </a:srgbClr>
+            </a:outerShdw>
+          </a:effectLst>
+        </p:spPr>
+        <p:style>
+          <a:lnRef idx="1">
+            <a:schemeClr val="accent1"/>
+          </a:lnRef>
+          <a:fillRef idx="3">
+            <a:schemeClr val="accent1"/>
+          </a:fillRef>
+          <a:effectRef idx="2">
+            <a:schemeClr val="accent1"/>
+          </a:effectRef>
+          <a:fontRef idx="minor">
+            <a:schemeClr val="lt1"/>
+          </a:fontRef>
+        </p:style>
+        <p:txBody>
+          <a:bodyPr rtlCol="0" anchor="ctr" wrap="square"/>
+          <a:lstStyle/>
+          <a:p>
+            <a:pPr algn="ctr"/>
+          </a:p>
+        </p:txBody>
+      </p:sp>
+      <p:sp>
+        <p:nvSpPr>
+          <p:cNvPr id="18" name="TextBox 17"/>
+          <p:cNvSpPr txBox="1"/>
+          <p:nvPr/>
+        </p:nvSpPr>
+        <p:spPr>
+          <a:xfrm>
+            <a:off x="3523411" y="2990088"/>
+            <a:ext cx="2316403" cy="251205"/>
           </a:xfrm>
           <a:prstGeom prst="rect">
             <a:avLst/>
@@ -13484,54 +13733,467 @@
           <a:p>
             <a:pPr algn="l"/>
             <a:r>
-              <a:rPr sz="750" b="1" i="0" spc="250">
+              <a:rPr sz="1300" b="1" i="0">
+                <a:solidFill>
+                  <a:srgbClr val="1A0F5C"/>
+                </a:solidFill>
+                <a:latin typeface="Calibri"/>
+              </a:rPr>
+              <a:t>The real gap</a:t>
+            </a:r>
+          </a:p>
+        </p:txBody>
+      </p:sp>
+      <p:sp>
+        <p:nvSpPr>
+          <p:cNvPr id="19" name="TextBox 18"/>
+          <p:cNvSpPr txBox="1"/>
+          <p:nvPr/>
+        </p:nvSpPr>
+        <p:spPr>
+          <a:xfrm>
+            <a:off x="3523411" y="3277870"/>
+            <a:ext cx="2316403" cy="366776"/>
+          </a:xfrm>
+          <a:prstGeom prst="rect">
+            <a:avLst/>
+          </a:prstGeom>
+          <a:noFill/>
+        </p:spPr>
+        <p:txBody>
+          <a:bodyPr wrap="square" anchor="t" lIns="0" rIns="0" tIns="0" bIns="0">
+            <a:spAutoFit/>
+          </a:bodyPr>
+          <a:lstStyle/>
+          <a:p>
+            <a:pPr algn="l"/>
+            <a:r>
+              <a:rPr sz="1000" b="0" i="0">
+                <a:solidFill>
+                  <a:srgbClr val="6B6690"/>
+                </a:solidFill>
+                <a:latin typeface="Calibri"/>
+              </a:rPr>
+              <a:t>Q1 mean less Q2 mean, printed in rupees before any shuffle runs.</a:t>
+            </a:r>
+          </a:p>
+        </p:txBody>
+      </p:sp>
+      <p:sp>
+        <p:nvSpPr>
+          <p:cNvPr id="20" name="TextBox 19"/>
+          <p:cNvSpPr txBox="1"/>
+          <p:nvPr/>
+        </p:nvSpPr>
+        <p:spPr>
+          <a:xfrm>
+            <a:off x="6187287" y="1956816"/>
+            <a:ext cx="2645587" cy="168656"/>
+          </a:xfrm>
+          <a:prstGeom prst="rect">
+            <a:avLst/>
+          </a:prstGeom>
+          <a:noFill/>
+        </p:spPr>
+        <p:txBody>
+          <a:bodyPr wrap="square" anchor="t" lIns="0" rIns="0" tIns="0" bIns="0">
+            <a:spAutoFit/>
+          </a:bodyPr>
+          <a:lstStyle/>
+          <a:p>
+            <a:pPr algn="ctr"/>
+            <a:r>
+              <a:rPr sz="800" b="1" i="0" spc="250">
                 <a:solidFill>
                   <a:srgbClr val="5B3FD6"/>
                 </a:solidFill>
                 <a:latin typeface="Calibri"/>
               </a:rPr>
-              <a:t>WHAT BREAKS</a:t>
-            </a:r>
-          </a:p>
-        </p:txBody>
-      </p:sp>
-      <p:sp>
-        <p:nvSpPr>
-          <p:cNvPr id="14" name="TextBox 13"/>
-          <p:cNvSpPr txBox="1"/>
-          <p:nvPr/>
-        </p:nvSpPr>
-        <p:spPr>
-          <a:xfrm>
-            <a:off x="1399031" y="3597592"/>
-            <a:ext cx="9987991" cy="682752"/>
-          </a:xfrm>
-          <a:prstGeom prst="rect">
-            <a:avLst/>
-          </a:prstGeom>
-          <a:noFill/>
-        </p:spPr>
-        <p:txBody>
-          <a:bodyPr wrap="square" anchor="t" lIns="0" rIns="0" tIns="0" bIns="0">
-            <a:spAutoFit/>
-          </a:bodyPr>
-          <a:lstStyle/>
-          <a:p>
-            <a:r>
-              <a:rPr sz="1500" b="0" i="0">
-                <a:solidFill>
-                  <a:srgbClr val="1A1440"/>
-                </a:solidFill>
-                <a:latin typeface="Calibri"/>
-              </a:rPr>
-              <a:t>"p = 0.03, so there is a 3 percent chance we are wrong" reads as precise, sounds like probability, and sends Meera into Monday certain.</a:t>
-            </a:r>
-          </a:p>
-        </p:txBody>
-      </p:sp>
-      <p:sp>
-        <p:nvSpPr>
-          <p:cNvPr id="15" name="Oval 14"/>
+              <a:t>STEP 3</a:t>
+            </a:r>
+          </a:p>
+        </p:txBody>
+      </p:sp>
+      <p:sp>
+        <p:nvSpPr>
+          <p:cNvPr id="21" name="Oval 20"/>
+          <p:cNvSpPr/>
+          <p:nvPr/>
+        </p:nvSpPr>
+        <p:spPr>
+          <a:xfrm>
+            <a:off x="7409497" y="2432304"/>
+            <a:ext cx="201168" cy="201168"/>
+          </a:xfrm>
+          <a:prstGeom prst="ellipse">
+            <a:avLst/>
+          </a:prstGeom>
+          <a:solidFill>
+            <a:srgbClr val="5B3FD6"/>
+          </a:solidFill>
+          <a:ln>
+            <a:noFill/>
+          </a:ln>
+          <a:effectLst/>
+        </p:spPr>
+        <p:style>
+          <a:lnRef idx="1">
+            <a:schemeClr val="accent1"/>
+          </a:lnRef>
+          <a:fillRef idx="3">
+            <a:schemeClr val="accent1"/>
+          </a:fillRef>
+          <a:effectRef idx="2">
+            <a:schemeClr val="accent1"/>
+          </a:effectRef>
+          <a:fontRef idx="minor">
+            <a:schemeClr val="lt1"/>
+          </a:fontRef>
+        </p:style>
+        <p:txBody>
+          <a:bodyPr rtlCol="0" anchor="ctr" wrap="square"/>
+          <a:lstStyle/>
+          <a:p>
+            <a:pPr algn="ctr"/>
+          </a:p>
+        </p:txBody>
+      </p:sp>
+      <p:sp>
+        <p:nvSpPr>
+          <p:cNvPr id="22" name="Rounded Rectangle 21"/>
+          <p:cNvSpPr/>
+          <p:nvPr/>
+        </p:nvSpPr>
+        <p:spPr>
+          <a:xfrm>
+            <a:off x="6187287" y="2843784"/>
+            <a:ext cx="2645587" cy="1249680"/>
+          </a:xfrm>
+          <a:prstGeom prst="roundRect">
+            <a:avLst>
+              <a:gd name="adj" fmla="val 5000"/>
+            </a:avLst>
+          </a:prstGeom>
+          <a:solidFill>
+            <a:srgbClr val="FFFFFF"/>
+          </a:solidFill>
+          <a:ln w="9525">
+            <a:solidFill>
+              <a:srgbClr val="E4E1F1"/>
+            </a:solidFill>
+          </a:ln>
+          <a:effectLst>
+            <a:outerShdw blurRad="76200" dist="19050" dir="5400000" algn="bl" rotWithShape="0">
+              <a:srgbClr val="1A0F5C">
+                <a:alpha val="12000"/>
+              </a:srgbClr>
+            </a:outerShdw>
+          </a:effectLst>
+        </p:spPr>
+        <p:style>
+          <a:lnRef idx="1">
+            <a:schemeClr val="accent1"/>
+          </a:lnRef>
+          <a:fillRef idx="3">
+            <a:schemeClr val="accent1"/>
+          </a:fillRef>
+          <a:effectRef idx="2">
+            <a:schemeClr val="accent1"/>
+          </a:effectRef>
+          <a:fontRef idx="minor">
+            <a:schemeClr val="lt1"/>
+          </a:fontRef>
+        </p:style>
+        <p:txBody>
+          <a:bodyPr rtlCol="0" anchor="ctr" wrap="square"/>
+          <a:lstStyle/>
+          <a:p>
+            <a:pPr algn="ctr"/>
+          </a:p>
+        </p:txBody>
+      </p:sp>
+      <p:sp>
+        <p:nvSpPr>
+          <p:cNvPr id="23" name="TextBox 22"/>
+          <p:cNvSpPr txBox="1"/>
+          <p:nvPr/>
+        </p:nvSpPr>
+        <p:spPr>
+          <a:xfrm>
+            <a:off x="6351879" y="2990088"/>
+            <a:ext cx="2316403" cy="251205"/>
+          </a:xfrm>
+          <a:prstGeom prst="rect">
+            <a:avLst/>
+          </a:prstGeom>
+          <a:noFill/>
+        </p:spPr>
+        <p:txBody>
+          <a:bodyPr wrap="square" anchor="t" lIns="0" rIns="0" tIns="0" bIns="0">
+            <a:spAutoFit/>
+          </a:bodyPr>
+          <a:lstStyle/>
+          <a:p>
+            <a:pPr algn="l"/>
+            <a:r>
+              <a:rPr sz="1300" b="1" i="0">
+                <a:solidFill>
+                  <a:srgbClr val="1A0F5C"/>
+                </a:solidFill>
+                <a:latin typeface="Calibri"/>
+              </a:rPr>
+              <a:t>The shuffles</a:t>
+            </a:r>
+          </a:p>
+        </p:txBody>
+      </p:sp>
+      <p:sp>
+        <p:nvSpPr>
+          <p:cNvPr id="24" name="TextBox 23"/>
+          <p:cNvSpPr txBox="1"/>
+          <p:nvPr/>
+        </p:nvSpPr>
+        <p:spPr>
+          <a:xfrm>
+            <a:off x="6351879" y="3277870"/>
+            <a:ext cx="2316403" cy="366776"/>
+          </a:xfrm>
+          <a:prstGeom prst="rect">
+            <a:avLst/>
+          </a:prstGeom>
+          <a:noFill/>
+        </p:spPr>
+        <p:txBody>
+          <a:bodyPr wrap="square" anchor="t" lIns="0" rIns="0" tIns="0" bIns="0">
+            <a:spAutoFit/>
+          </a:bodyPr>
+          <a:lstStyle/>
+          <a:p>
+            <a:pPr algn="l"/>
+            <a:r>
+              <a:rPr sz="1000" b="0" i="0">
+                <a:solidFill>
+                  <a:srgbClr val="6B6690"/>
+                </a:solidFill>
+                <a:latin typeface="Calibri"/>
+              </a:rPr>
+              <a:t>5,000, seed 2026, and the share at least as large as the real gap.</a:t>
+            </a:r>
+          </a:p>
+        </p:txBody>
+      </p:sp>
+      <p:sp>
+        <p:nvSpPr>
+          <p:cNvPr id="25" name="TextBox 24"/>
+          <p:cNvSpPr txBox="1"/>
+          <p:nvPr/>
+        </p:nvSpPr>
+        <p:spPr>
+          <a:xfrm>
+            <a:off x="9015755" y="1956816"/>
+            <a:ext cx="2645587" cy="168656"/>
+          </a:xfrm>
+          <a:prstGeom prst="rect">
+            <a:avLst/>
+          </a:prstGeom>
+          <a:noFill/>
+        </p:spPr>
+        <p:txBody>
+          <a:bodyPr wrap="square" anchor="t" lIns="0" rIns="0" tIns="0" bIns="0">
+            <a:spAutoFit/>
+          </a:bodyPr>
+          <a:lstStyle/>
+          <a:p>
+            <a:pPr algn="ctr"/>
+            <a:r>
+              <a:rPr sz="800" b="1" i="0" spc="250">
+                <a:solidFill>
+                  <a:srgbClr val="5B3FD6"/>
+                </a:solidFill>
+                <a:latin typeface="Calibri"/>
+              </a:rPr>
+              <a:t>STEP 4</a:t>
+            </a:r>
+          </a:p>
+        </p:txBody>
+      </p:sp>
+      <p:sp>
+        <p:nvSpPr>
+          <p:cNvPr id="26" name="Oval 25"/>
+          <p:cNvSpPr/>
+          <p:nvPr/>
+        </p:nvSpPr>
+        <p:spPr>
+          <a:xfrm>
+            <a:off x="10237965" y="2432304"/>
+            <a:ext cx="201168" cy="201168"/>
+          </a:xfrm>
+          <a:prstGeom prst="ellipse">
+            <a:avLst/>
+          </a:prstGeom>
+          <a:solidFill>
+            <a:srgbClr val="D9A7FF"/>
+          </a:solidFill>
+          <a:ln>
+            <a:noFill/>
+          </a:ln>
+          <a:effectLst/>
+        </p:spPr>
+        <p:style>
+          <a:lnRef idx="1">
+            <a:schemeClr val="accent1"/>
+          </a:lnRef>
+          <a:fillRef idx="3">
+            <a:schemeClr val="accent1"/>
+          </a:fillRef>
+          <a:effectRef idx="2">
+            <a:schemeClr val="accent1"/>
+          </a:effectRef>
+          <a:fontRef idx="minor">
+            <a:schemeClr val="lt1"/>
+          </a:fontRef>
+        </p:style>
+        <p:txBody>
+          <a:bodyPr rtlCol="0" anchor="ctr" wrap="square"/>
+          <a:lstStyle/>
+          <a:p>
+            <a:pPr algn="ctr"/>
+          </a:p>
+        </p:txBody>
+      </p:sp>
+      <p:sp>
+        <p:nvSpPr>
+          <p:cNvPr id="27" name="Rounded Rectangle 26"/>
+          <p:cNvSpPr/>
+          <p:nvPr/>
+        </p:nvSpPr>
+        <p:spPr>
+          <a:xfrm>
+            <a:off x="9015755" y="2843784"/>
+            <a:ext cx="2645587" cy="1249680"/>
+          </a:xfrm>
+          <a:prstGeom prst="roundRect">
+            <a:avLst>
+              <a:gd name="adj" fmla="val 5000"/>
+            </a:avLst>
+          </a:prstGeom>
+          <a:gradFill rotWithShape="1">
+            <a:gsLst>
+              <a:gs pos="0">
+                <a:srgbClr val="2C1A86"/>
+              </a:gs>
+              <a:gs pos="100000">
+                <a:srgbClr val="1A0F5C"/>
+              </a:gs>
+            </a:gsLst>
+            <a:lin scaled="0" ang="16200000"/>
+          </a:gradFill>
+          <a:ln>
+            <a:noFill/>
+          </a:ln>
+          <a:effectLst>
+            <a:outerShdw blurRad="76200" dist="19050" dir="5400000" algn="bl" rotWithShape="0">
+              <a:srgbClr val="1A0F5C">
+                <a:alpha val="12000"/>
+              </a:srgbClr>
+            </a:outerShdw>
+          </a:effectLst>
+        </p:spPr>
+        <p:style>
+          <a:lnRef idx="1">
+            <a:schemeClr val="accent1"/>
+          </a:lnRef>
+          <a:fillRef idx="3">
+            <a:schemeClr val="accent1"/>
+          </a:fillRef>
+          <a:effectRef idx="2">
+            <a:schemeClr val="accent1"/>
+          </a:effectRef>
+          <a:fontRef idx="minor">
+            <a:schemeClr val="lt1"/>
+          </a:fontRef>
+        </p:style>
+        <p:txBody>
+          <a:bodyPr rtlCol="0" anchor="ctr" wrap="square"/>
+          <a:lstStyle/>
+          <a:p>
+            <a:pPr algn="ctr"/>
+          </a:p>
+        </p:txBody>
+      </p:sp>
+      <p:sp>
+        <p:nvSpPr>
+          <p:cNvPr id="28" name="TextBox 27"/>
+          <p:cNvSpPr txBox="1"/>
+          <p:nvPr/>
+        </p:nvSpPr>
+        <p:spPr>
+          <a:xfrm>
+            <a:off x="9180347" y="2990088"/>
+            <a:ext cx="2316403" cy="251205"/>
+          </a:xfrm>
+          <a:prstGeom prst="rect">
+            <a:avLst/>
+          </a:prstGeom>
+          <a:noFill/>
+        </p:spPr>
+        <p:txBody>
+          <a:bodyPr wrap="square" anchor="t" lIns="0" rIns="0" tIns="0" bIns="0">
+            <a:spAutoFit/>
+          </a:bodyPr>
+          <a:lstStyle/>
+          <a:p>
+            <a:pPr algn="l"/>
+            <a:r>
+              <a:rPr sz="1300" b="1" i="0">
+                <a:solidFill>
+                  <a:srgbClr val="FFFFFF"/>
+                </a:solidFill>
+                <a:latin typeface="Calibri"/>
+              </a:rPr>
+              <a:t>The first draft</a:t>
+            </a:r>
+          </a:p>
+        </p:txBody>
+      </p:sp>
+      <p:sp>
+        <p:nvSpPr>
+          <p:cNvPr id="29" name="TextBox 28"/>
+          <p:cNvSpPr txBox="1"/>
+          <p:nvPr/>
+        </p:nvSpPr>
+        <p:spPr>
+          <a:xfrm>
+            <a:off x="9180347" y="3277870"/>
+            <a:ext cx="2316403" cy="366776"/>
+          </a:xfrm>
+          <a:prstGeom prst="rect">
+            <a:avLst/>
+          </a:prstGeom>
+          <a:noFill/>
+        </p:spPr>
+        <p:txBody>
+          <a:bodyPr wrap="square" anchor="t" lIns="0" rIns="0" tIns="0" bIns="0">
+            <a:spAutoFit/>
+          </a:bodyPr>
+          <a:lstStyle/>
+          <a:p>
+            <a:pPr algn="l"/>
+            <a:r>
+              <a:rPr sz="1000" b="0" i="0">
+                <a:solidFill>
+                  <a:srgbClr val="CFC9EE"/>
+                </a:solidFill>
+                <a:latin typeface="Calibri"/>
+              </a:rPr>
+              <a:t>One line to Meera on what your share means, written fast and kept.</a:t>
+            </a:r>
+          </a:p>
+        </p:txBody>
+      </p:sp>
+      <p:sp>
+        <p:nvSpPr>
+          <p:cNvPr id="30" name="Oval 29"/>
           <p:cNvSpPr/>
           <p:nvPr/>
         </p:nvSpPr>
@@ -13575,7 +14237,7 @@
       </p:sp>
       <p:sp>
         <p:nvSpPr>
-          <p:cNvPr id="16" name="TextBox 15"/>
+          <p:cNvPr id="31" name="TextBox 30"/>
           <p:cNvSpPr txBox="1"/>
           <p:nvPr/>
         </p:nvSpPr>
@@ -13610,7 +14272,7 @@
       </p:sp>
       <p:sp>
         <p:nvSpPr>
-          <p:cNvPr id="17" name="Oval 16"/>
+          <p:cNvPr id="32" name="Oval 31"/>
           <p:cNvSpPr/>
           <p:nvPr/>
         </p:nvSpPr>
@@ -13654,7 +14316,7 @@
       </p:sp>
       <p:sp>
         <p:nvSpPr>
-          <p:cNvPr id="18" name="TextBox 17"/>
+          <p:cNvPr id="33" name="TextBox 32"/>
           <p:cNvSpPr txBox="1"/>
           <p:nvPr/>
         </p:nvSpPr>
@@ -13689,7 +14351,7 @@
       </p:sp>
       <p:sp>
         <p:nvSpPr>
-          <p:cNvPr id="19" name="Oval 18"/>
+          <p:cNvPr id="34" name="Oval 33"/>
           <p:cNvSpPr/>
           <p:nvPr/>
         </p:nvSpPr>
@@ -13733,7 +14395,7 @@
       </p:sp>
       <p:sp>
         <p:nvSpPr>
-          <p:cNvPr id="20" name="TextBox 19"/>
+          <p:cNvPr id="35" name="TextBox 34"/>
           <p:cNvSpPr txBox="1"/>
           <p:nvPr/>
         </p:nvSpPr>
@@ -13768,7 +14430,7 @@
       </p:sp>
       <p:sp>
         <p:nvSpPr>
-          <p:cNvPr id="21" name="Oval 20"/>
+          <p:cNvPr id="36" name="Oval 35"/>
           <p:cNvSpPr/>
           <p:nvPr/>
         </p:nvSpPr>
@@ -13812,7 +14474,7 @@
       </p:sp>
       <p:sp>
         <p:nvSpPr>
-          <p:cNvPr id="22" name="TextBox 21"/>
+          <p:cNvPr id="37" name="TextBox 36"/>
           <p:cNvSpPr txBox="1"/>
           <p:nvPr/>
         </p:nvSpPr>
@@ -13847,7 +14509,7 @@
       </p:sp>
       <p:sp>
         <p:nvSpPr>
-          <p:cNvPr id="23" name="TextBox 22"/>
+          <p:cNvPr id="38" name="TextBox 37"/>
           <p:cNvSpPr txBox="1"/>
           <p:nvPr/>
         </p:nvSpPr>
@@ -14081,6 +14743,813 @@
                 </a:solidFill>
                 <a:latin typeface="Georgia"/>
               </a:rPr>
+              <a:t>The plausible wrong answer</a:t>
+            </a:r>
+          </a:p>
+        </p:txBody>
+      </p:sp>
+      <p:sp>
+        <p:nvSpPr>
+          <p:cNvPr id="8" name="TextBox 7"/>
+          <p:cNvSpPr txBox="1"/>
+          <p:nvPr/>
+        </p:nvSpPr>
+        <p:spPr>
+          <a:xfrm>
+            <a:off x="530352" y="1243584"/>
+            <a:ext cx="11130991" cy="234696"/>
+          </a:xfrm>
+          <a:prstGeom prst="rect">
+            <a:avLst/>
+          </a:prstGeom>
+          <a:noFill/>
+        </p:spPr>
+        <p:txBody>
+          <a:bodyPr wrap="square" anchor="t" lIns="0" rIns="0" tIns="0" bIns="0">
+            <a:spAutoFit/>
+          </a:bodyPr>
+          <a:lstStyle/>
+          <a:p>
+            <a:pPr algn="l"/>
+            <a:r>
+              <a:rPr sz="1200" b="0" i="0">
+                <a:solidFill>
+                  <a:srgbClr val="6B6690"/>
+                </a:solidFill>
+                <a:latin typeface="Calibri"/>
+              </a:rPr>
+              <a:t>A draft note, written in a hurry from the share the room has just computed.</a:t>
+            </a:r>
+          </a:p>
+        </p:txBody>
+      </p:sp>
+      <p:pic>
+        <p:nvPicPr>
+          <p:cNvPr id="9" name="mermaid diagram" descr="110e5667504f6893.png"/>
+          <p:cNvPicPr>
+            <a:picLocks noChangeAspect="1"/>
+          </p:cNvPicPr>
+          <p:nvPr/>
+        </p:nvPicPr>
+        <p:blipFill>
+          <a:blip r:embed="rId6"/>
+          <a:stretch>
+            <a:fillRect/>
+          </a:stretch>
+        </p:blipFill>
+        <p:spPr>
+          <a:xfrm>
+            <a:off x="1566710" y="1956816"/>
+            <a:ext cx="9058275" cy="1128712"/>
+          </a:xfrm>
+          <a:prstGeom prst="rect">
+            <a:avLst/>
+          </a:prstGeom>
+        </p:spPr>
+      </p:pic>
+      <p:sp>
+        <p:nvSpPr>
+          <p:cNvPr id="10" name="Rounded Rectangle 9"/>
+          <p:cNvSpPr/>
+          <p:nvPr/>
+        </p:nvSpPr>
+        <p:spPr>
+          <a:xfrm>
+            <a:off x="530352" y="3231832"/>
+            <a:ext cx="11130991" cy="1121664"/>
+          </a:xfrm>
+          <a:prstGeom prst="roundRect">
+            <a:avLst>
+              <a:gd name="adj" fmla="val 5000"/>
+            </a:avLst>
+          </a:prstGeom>
+          <a:solidFill>
+            <a:srgbClr val="F7F5FD"/>
+          </a:solidFill>
+          <a:ln w="9525">
+            <a:solidFill>
+              <a:srgbClr val="E4E1F1"/>
+            </a:solidFill>
+          </a:ln>
+          <a:effectLst>
+            <a:outerShdw blurRad="76200" dist="19050" dir="5400000" algn="bl" rotWithShape="0">
+              <a:srgbClr val="1A0F5C">
+                <a:alpha val="12000"/>
+              </a:srgbClr>
+            </a:outerShdw>
+          </a:effectLst>
+        </p:spPr>
+        <p:style>
+          <a:lnRef idx="1">
+            <a:schemeClr val="accent1"/>
+          </a:lnRef>
+          <a:fillRef idx="3">
+            <a:schemeClr val="accent1"/>
+          </a:fillRef>
+          <a:effectRef idx="2">
+            <a:schemeClr val="accent1"/>
+          </a:effectRef>
+          <a:fontRef idx="minor">
+            <a:schemeClr val="lt1"/>
+          </a:fontRef>
+        </p:style>
+        <p:txBody>
+          <a:bodyPr rtlCol="0" anchor="ctr" wrap="square"/>
+          <a:lstStyle/>
+          <a:p>
+            <a:pPr algn="ctr"/>
+          </a:p>
+        </p:txBody>
+      </p:sp>
+      <p:sp>
+        <p:nvSpPr>
+          <p:cNvPr id="11" name="Oval 10"/>
+          <p:cNvSpPr/>
+          <p:nvPr/>
+        </p:nvSpPr>
+        <p:spPr>
+          <a:xfrm>
+            <a:off x="758952" y="3564064"/>
+            <a:ext cx="457200" cy="457200"/>
+          </a:xfrm>
+          <a:prstGeom prst="ellipse">
+            <a:avLst/>
+          </a:prstGeom>
+          <a:solidFill>
+            <a:srgbClr val="5B3FD6"/>
+          </a:solidFill>
+          <a:ln>
+            <a:noFill/>
+          </a:ln>
+          <a:effectLst/>
+        </p:spPr>
+        <p:style>
+          <a:lnRef idx="1">
+            <a:schemeClr val="accent1"/>
+          </a:lnRef>
+          <a:fillRef idx="3">
+            <a:schemeClr val="accent1"/>
+          </a:fillRef>
+          <a:effectRef idx="2">
+            <a:schemeClr val="accent1"/>
+          </a:effectRef>
+          <a:fontRef idx="minor">
+            <a:schemeClr val="lt1"/>
+          </a:fontRef>
+        </p:style>
+        <p:txBody>
+          <a:bodyPr rtlCol="0" anchor="ctr" wrap="square"/>
+          <a:lstStyle/>
+          <a:p>
+            <a:pPr algn="ctr"/>
+          </a:p>
+        </p:txBody>
+      </p:sp>
+      <p:pic>
+        <p:nvPicPr>
+          <p:cNvPr id="12" name="Picture 11" descr="bug_39ada6eff46d.png"/>
+          <p:cNvPicPr>
+            <a:picLocks noChangeAspect="1"/>
+          </p:cNvPicPr>
+          <p:nvPr/>
+        </p:nvPicPr>
+        <p:blipFill>
+          <a:blip r:embed="rId5"/>
+          <a:stretch>
+            <a:fillRect/>
+          </a:stretch>
+        </p:blipFill>
+        <p:spPr>
+          <a:xfrm>
+            <a:off x="868680" y="3673792"/>
+            <a:ext cx="237744" cy="237744"/>
+          </a:xfrm>
+          <a:prstGeom prst="rect">
+            <a:avLst/>
+          </a:prstGeom>
+        </p:spPr>
+      </p:pic>
+      <p:sp>
+        <p:nvSpPr>
+          <p:cNvPr id="13" name="TextBox 12"/>
+          <p:cNvSpPr txBox="1"/>
+          <p:nvPr/>
+        </p:nvSpPr>
+        <p:spPr>
+          <a:xfrm>
+            <a:off x="1399031" y="3378136"/>
+            <a:ext cx="9987991" cy="160401"/>
+          </a:xfrm>
+          <a:prstGeom prst="rect">
+            <a:avLst/>
+          </a:prstGeom>
+          <a:noFill/>
+        </p:spPr>
+        <p:txBody>
+          <a:bodyPr wrap="square" anchor="t" lIns="0" rIns="0" tIns="0" bIns="0">
+            <a:spAutoFit/>
+          </a:bodyPr>
+          <a:lstStyle/>
+          <a:p>
+            <a:pPr algn="l"/>
+            <a:r>
+              <a:rPr sz="750" b="1" i="0" spc="250">
+                <a:solidFill>
+                  <a:srgbClr val="5B3FD6"/>
+                </a:solidFill>
+                <a:latin typeface="Calibri"/>
+              </a:rPr>
+              <a:t>WHAT BREAKS</a:t>
+            </a:r>
+          </a:p>
+        </p:txBody>
+      </p:sp>
+      <p:sp>
+        <p:nvSpPr>
+          <p:cNvPr id="14" name="TextBox 13"/>
+          <p:cNvSpPr txBox="1"/>
+          <p:nvPr/>
+        </p:nvSpPr>
+        <p:spPr>
+          <a:xfrm>
+            <a:off x="1399031" y="3597592"/>
+            <a:ext cx="9987991" cy="682752"/>
+          </a:xfrm>
+          <a:prstGeom prst="rect">
+            <a:avLst/>
+          </a:prstGeom>
+          <a:noFill/>
+        </p:spPr>
+        <p:txBody>
+          <a:bodyPr wrap="square" anchor="t" lIns="0" rIns="0" tIns="0" bIns="0">
+            <a:spAutoFit/>
+          </a:bodyPr>
+          <a:lstStyle/>
+          <a:p>
+            <a:r>
+              <a:rPr sz="1500" b="0" i="0">
+                <a:solidFill>
+                  <a:srgbClr val="1A1440"/>
+                </a:solidFill>
+                <a:latin typeface="Calibri"/>
+              </a:rPr>
+              <a:t>"p = 0.03, so there is a 3 percent chance we are wrong" reads as precise, sounds like probability, and sends Meera into Monday certain.</a:t>
+            </a:r>
+          </a:p>
+        </p:txBody>
+      </p:sp>
+      <p:sp>
+        <p:nvSpPr>
+          <p:cNvPr id="15" name="Oval 14"/>
+          <p:cNvSpPr/>
+          <p:nvPr/>
+        </p:nvSpPr>
+        <p:spPr>
+          <a:xfrm>
+            <a:off x="530352" y="6492240"/>
+            <a:ext cx="64008" cy="64008"/>
+          </a:xfrm>
+          <a:prstGeom prst="ellipse">
+            <a:avLst/>
+          </a:prstGeom>
+          <a:solidFill>
+            <a:srgbClr val="CFC9EE"/>
+          </a:solidFill>
+          <a:ln>
+            <a:noFill/>
+          </a:ln>
+          <a:effectLst/>
+        </p:spPr>
+        <p:style>
+          <a:lnRef idx="1">
+            <a:schemeClr val="accent1"/>
+          </a:lnRef>
+          <a:fillRef idx="3">
+            <a:schemeClr val="accent1"/>
+          </a:fillRef>
+          <a:effectRef idx="2">
+            <a:schemeClr val="accent1"/>
+          </a:effectRef>
+          <a:fontRef idx="minor">
+            <a:schemeClr val="lt1"/>
+          </a:fontRef>
+        </p:style>
+        <p:txBody>
+          <a:bodyPr rtlCol="0" anchor="ctr" wrap="square"/>
+          <a:lstStyle/>
+          <a:p>
+            <a:pPr algn="ctr"/>
+          </a:p>
+        </p:txBody>
+      </p:sp>
+      <p:sp>
+        <p:nvSpPr>
+          <p:cNvPr id="16" name="TextBox 15"/>
+          <p:cNvSpPr txBox="1"/>
+          <p:nvPr/>
+        </p:nvSpPr>
+        <p:spPr>
+          <a:xfrm>
+            <a:off x="640080" y="6437376"/>
+            <a:ext cx="596360" cy="152146"/>
+          </a:xfrm>
+          <a:prstGeom prst="rect">
+            <a:avLst/>
+          </a:prstGeom>
+          <a:noFill/>
+        </p:spPr>
+        <p:txBody>
+          <a:bodyPr wrap="square" anchor="t" lIns="0" rIns="0" tIns="0" bIns="0">
+            <a:spAutoFit/>
+          </a:bodyPr>
+          <a:lstStyle/>
+          <a:p>
+            <a:pPr algn="l"/>
+            <a:r>
+              <a:rPr sz="700" b="0" i="0">
+                <a:solidFill>
+                  <a:srgbClr val="6B6690"/>
+                </a:solidFill>
+                <a:latin typeface="Calibri"/>
+              </a:rPr>
+              <a:t>The ask</a:t>
+            </a:r>
+          </a:p>
+        </p:txBody>
+      </p:sp>
+      <p:sp>
+        <p:nvSpPr>
+          <p:cNvPr id="17" name="Oval 16"/>
+          <p:cNvSpPr/>
+          <p:nvPr/>
+        </p:nvSpPr>
+        <p:spPr>
+          <a:xfrm>
+            <a:off x="1327880" y="6492240"/>
+            <a:ext cx="64008" cy="64008"/>
+          </a:xfrm>
+          <a:prstGeom prst="ellipse">
+            <a:avLst/>
+          </a:prstGeom>
+          <a:solidFill>
+            <a:srgbClr val="5B3FD6"/>
+          </a:solidFill>
+          <a:ln>
+            <a:noFill/>
+          </a:ln>
+          <a:effectLst/>
+        </p:spPr>
+        <p:style>
+          <a:lnRef idx="1">
+            <a:schemeClr val="accent1"/>
+          </a:lnRef>
+          <a:fillRef idx="3">
+            <a:schemeClr val="accent1"/>
+          </a:fillRef>
+          <a:effectRef idx="2">
+            <a:schemeClr val="accent1"/>
+          </a:effectRef>
+          <a:fontRef idx="minor">
+            <a:schemeClr val="lt1"/>
+          </a:fontRef>
+        </p:style>
+        <p:txBody>
+          <a:bodyPr rtlCol="0" anchor="ctr" wrap="square"/>
+          <a:lstStyle/>
+          <a:p>
+            <a:pPr algn="ctr"/>
+          </a:p>
+        </p:txBody>
+      </p:sp>
+      <p:sp>
+        <p:nvSpPr>
+          <p:cNvPr id="18" name="TextBox 17"/>
+          <p:cNvSpPr txBox="1"/>
+          <p:nvPr/>
+        </p:nvSpPr>
+        <p:spPr>
+          <a:xfrm>
+            <a:off x="1437608" y="6437376"/>
+            <a:ext cx="1562480" cy="152146"/>
+          </a:xfrm>
+          <a:prstGeom prst="rect">
+            <a:avLst/>
+          </a:prstGeom>
+          <a:noFill/>
+        </p:spPr>
+        <p:txBody>
+          <a:bodyPr wrap="square" anchor="t" lIns="0" rIns="0" tIns="0" bIns="0">
+            <a:spAutoFit/>
+          </a:bodyPr>
+          <a:lstStyle/>
+          <a:p>
+            <a:pPr algn="l"/>
+            <a:r>
+              <a:rPr sz="700" b="1" i="0">
+                <a:solidFill>
+                  <a:srgbClr val="5B3FD6"/>
+                </a:solidFill>
+                <a:latin typeface="Calibri"/>
+              </a:rPr>
+              <a:t>Round 1. Real, or the wobble</a:t>
+            </a:r>
+          </a:p>
+        </p:txBody>
+      </p:sp>
+      <p:sp>
+        <p:nvSpPr>
+          <p:cNvPr id="19" name="Oval 18"/>
+          <p:cNvSpPr/>
+          <p:nvPr/>
+        </p:nvSpPr>
+        <p:spPr>
+          <a:xfrm>
+            <a:off x="3091529" y="6492240"/>
+            <a:ext cx="64008" cy="64008"/>
+          </a:xfrm>
+          <a:prstGeom prst="ellipse">
+            <a:avLst/>
+          </a:prstGeom>
+          <a:solidFill>
+            <a:srgbClr val="CFC9EE"/>
+          </a:solidFill>
+          <a:ln>
+            <a:noFill/>
+          </a:ln>
+          <a:effectLst/>
+        </p:spPr>
+        <p:style>
+          <a:lnRef idx="1">
+            <a:schemeClr val="accent1"/>
+          </a:lnRef>
+          <a:fillRef idx="3">
+            <a:schemeClr val="accent1"/>
+          </a:fillRef>
+          <a:effectRef idx="2">
+            <a:schemeClr val="accent1"/>
+          </a:effectRef>
+          <a:fontRef idx="minor">
+            <a:schemeClr val="lt1"/>
+          </a:fontRef>
+        </p:style>
+        <p:txBody>
+          <a:bodyPr rtlCol="0" anchor="ctr" wrap="square"/>
+          <a:lstStyle/>
+          <a:p>
+            <a:pPr algn="ctr"/>
+          </a:p>
+        </p:txBody>
+      </p:sp>
+      <p:sp>
+        <p:nvSpPr>
+          <p:cNvPr id="20" name="TextBox 19"/>
+          <p:cNvSpPr txBox="1"/>
+          <p:nvPr/>
+        </p:nvSpPr>
+        <p:spPr>
+          <a:xfrm>
+            <a:off x="3201257" y="6437376"/>
+            <a:ext cx="1378457" cy="152146"/>
+          </a:xfrm>
+          <a:prstGeom prst="rect">
+            <a:avLst/>
+          </a:prstGeom>
+          <a:noFill/>
+        </p:spPr>
+        <p:txBody>
+          <a:bodyPr wrap="square" anchor="t" lIns="0" rIns="0" tIns="0" bIns="0">
+            <a:spAutoFit/>
+          </a:bodyPr>
+          <a:lstStyle/>
+          <a:p>
+            <a:pPr algn="l"/>
+            <a:r>
+              <a:rPr sz="700" b="0" i="0">
+                <a:solidFill>
+                  <a:srgbClr val="6B6690"/>
+                </a:solidFill>
+                <a:latin typeface="Calibri"/>
+              </a:rPr>
+              <a:t>Round 2. Worth acting on</a:t>
+            </a:r>
+          </a:p>
+        </p:txBody>
+      </p:sp>
+      <p:sp>
+        <p:nvSpPr>
+          <p:cNvPr id="21" name="Oval 20"/>
+          <p:cNvSpPr/>
+          <p:nvPr/>
+        </p:nvSpPr>
+        <p:spPr>
+          <a:xfrm>
+            <a:off x="4671155" y="6492240"/>
+            <a:ext cx="64008" cy="64008"/>
+          </a:xfrm>
+          <a:prstGeom prst="ellipse">
+            <a:avLst/>
+          </a:prstGeom>
+          <a:solidFill>
+            <a:srgbClr val="CFC9EE"/>
+          </a:solidFill>
+          <a:ln>
+            <a:noFill/>
+          </a:ln>
+          <a:effectLst/>
+        </p:spPr>
+        <p:style>
+          <a:lnRef idx="1">
+            <a:schemeClr val="accent1"/>
+          </a:lnRef>
+          <a:fillRef idx="3">
+            <a:schemeClr val="accent1"/>
+          </a:fillRef>
+          <a:effectRef idx="2">
+            <a:schemeClr val="accent1"/>
+          </a:effectRef>
+          <a:fontRef idx="minor">
+            <a:schemeClr val="lt1"/>
+          </a:fontRef>
+        </p:style>
+        <p:txBody>
+          <a:bodyPr rtlCol="0" anchor="ctr" wrap="square"/>
+          <a:lstStyle/>
+          <a:p>
+            <a:pPr algn="ctr"/>
+          </a:p>
+        </p:txBody>
+      </p:sp>
+      <p:sp>
+        <p:nvSpPr>
+          <p:cNvPr id="22" name="TextBox 21"/>
+          <p:cNvSpPr txBox="1"/>
+          <p:nvPr/>
+        </p:nvSpPr>
+        <p:spPr>
+          <a:xfrm>
+            <a:off x="4780883" y="6437376"/>
+            <a:ext cx="1930527" cy="152146"/>
+          </a:xfrm>
+          <a:prstGeom prst="rect">
+            <a:avLst/>
+          </a:prstGeom>
+          <a:noFill/>
+        </p:spPr>
+        <p:txBody>
+          <a:bodyPr wrap="square" anchor="t" lIns="0" rIns="0" tIns="0" bIns="0">
+            <a:spAutoFit/>
+          </a:bodyPr>
+          <a:lstStyle/>
+          <a:p>
+            <a:pPr algn="l"/>
+            <a:r>
+              <a:rPr sz="700" b="0" i="0">
+                <a:solidFill>
+                  <a:srgbClr val="6B6690"/>
+                </a:solidFill>
+                <a:latin typeface="Calibri"/>
+              </a:rPr>
+              <a:t>Round 3. The count behind 40 percent</a:t>
+            </a:r>
+          </a:p>
+        </p:txBody>
+      </p:sp>
+      <p:sp>
+        <p:nvSpPr>
+          <p:cNvPr id="23" name="TextBox 22"/>
+          <p:cNvSpPr txBox="1"/>
+          <p:nvPr/>
+        </p:nvSpPr>
+        <p:spPr>
+          <a:xfrm>
+            <a:off x="10198303" y="6437376"/>
+            <a:ext cx="1463040" cy="160401"/>
+          </a:xfrm>
+          <a:prstGeom prst="rect">
+            <a:avLst/>
+          </a:prstGeom>
+          <a:noFill/>
+        </p:spPr>
+        <p:txBody>
+          <a:bodyPr wrap="square" anchor="t" lIns="0" rIns="0" tIns="0" bIns="0">
+            <a:spAutoFit/>
+          </a:bodyPr>
+          <a:lstStyle/>
+          <a:p>
+            <a:pPr algn="r"/>
+            <a:r>
+              <a:rPr sz="750" b="0" i="0">
+                <a:solidFill>
+                  <a:srgbClr val="6B6690"/>
+                </a:solidFill>
+                <a:latin typeface="Calibri"/>
+              </a:rPr>
+              <a:t>S14  ·  17 / 44</a:t>
+            </a:r>
+          </a:p>
+        </p:txBody>
+      </p:sp>
+    </p:spTree>
+  </p:cSld>
+  <p:clrMapOvr>
+    <a:masterClrMapping/>
+  </p:clrMapOvr>
+</p:sld>
+</file>
+
+<file path=ppt/slides/slide18.xml><?xml version="1.0" encoding="utf-8"?>
+<p:sld xmlns:a="http://schemas.openxmlformats.org/drawingml/2006/main" xmlns:p="http://schemas.openxmlformats.org/presentationml/2006/main" xmlns:r="http://schemas.openxmlformats.org/officeDocument/2006/relationships">
+  <p:cSld>
+    <p:spTree>
+      <p:nvGrpSpPr>
+        <p:cNvPr id="1" name=""/>
+        <p:cNvGrpSpPr/>
+        <p:nvPr/>
+      </p:nvGrpSpPr>
+      <p:grpSpPr/>
+      <p:pic>
+        <p:nvPicPr>
+          <p:cNvPr id="2" name="Picture 1" descr="bg_light.jpg"/>
+          <p:cNvPicPr>
+            <a:picLocks noChangeAspect="1"/>
+          </p:cNvPicPr>
+          <p:nvPr/>
+        </p:nvPicPr>
+        <p:blipFill>
+          <a:blip r:embed="rId2"/>
+          <a:stretch>
+            <a:fillRect/>
+          </a:stretch>
+        </p:blipFill>
+        <p:spPr>
+          <a:xfrm>
+            <a:off x="0" y="0"/>
+            <a:ext cx="12191695" cy="6858000"/>
+          </a:xfrm>
+          <a:prstGeom prst="rect">
+            <a:avLst/>
+          </a:prstGeom>
+        </p:spPr>
+      </p:pic>
+      <p:pic>
+        <p:nvPicPr>
+          <p:cNvPr id="3" name="Picture 2" descr="iitgn_logo.png"/>
+          <p:cNvPicPr>
+            <a:picLocks noChangeAspect="1"/>
+          </p:cNvPicPr>
+          <p:nvPr/>
+        </p:nvPicPr>
+        <p:blipFill>
+          <a:blip r:embed="rId3"/>
+          <a:stretch>
+            <a:fillRect/>
+          </a:stretch>
+        </p:blipFill>
+        <p:spPr>
+          <a:xfrm>
+            <a:off x="530352" y="201168"/>
+            <a:ext cx="420624" cy="420624"/>
+          </a:xfrm>
+          <a:prstGeom prst="rect">
+            <a:avLst/>
+          </a:prstGeom>
+        </p:spPr>
+      </p:pic>
+      <p:sp>
+        <p:nvSpPr>
+          <p:cNvPr id="4" name="TextBox 3"/>
+          <p:cNvSpPr txBox="1"/>
+          <p:nvPr/>
+        </p:nvSpPr>
+        <p:spPr>
+          <a:xfrm>
+            <a:off x="1042416" y="228600"/>
+            <a:ext cx="5120640" cy="185166"/>
+          </a:xfrm>
+          <a:prstGeom prst="rect">
+            <a:avLst/>
+          </a:prstGeom>
+          <a:noFill/>
+        </p:spPr>
+        <p:txBody>
+          <a:bodyPr wrap="square" anchor="t" lIns="0" rIns="0" tIns="0" bIns="0">
+            <a:spAutoFit/>
+          </a:bodyPr>
+          <a:lstStyle/>
+          <a:p>
+            <a:pPr algn="l"/>
+            <a:r>
+              <a:rPr sz="900" b="1" i="0">
+                <a:solidFill>
+                  <a:srgbClr val="1A0F5C"/>
+                </a:solidFill>
+                <a:latin typeface="Calibri"/>
+              </a:rPr>
+              <a:t>Indian Institute of Technology Gandhinagar</a:t>
+            </a:r>
+          </a:p>
+        </p:txBody>
+      </p:sp>
+      <p:sp>
+        <p:nvSpPr>
+          <p:cNvPr id="5" name="TextBox 4"/>
+          <p:cNvSpPr txBox="1"/>
+          <p:nvPr/>
+        </p:nvSpPr>
+        <p:spPr>
+          <a:xfrm>
+            <a:off x="1042416" y="420623"/>
+            <a:ext cx="5852160" cy="127381"/>
+          </a:xfrm>
+          <a:prstGeom prst="rect">
+            <a:avLst/>
+          </a:prstGeom>
+          <a:noFill/>
+        </p:spPr>
+        <p:txBody>
+          <a:bodyPr wrap="square" anchor="t" lIns="0" rIns="0" tIns="0" bIns="0">
+            <a:spAutoFit/>
+          </a:bodyPr>
+          <a:lstStyle/>
+          <a:p>
+            <a:pPr algn="l"/>
+            <a:r>
+              <a:rPr sz="550" b="1" i="0" spc="300">
+                <a:solidFill>
+                  <a:srgbClr val="6B6690"/>
+                </a:solidFill>
+                <a:latin typeface="Calibri"/>
+              </a:rPr>
+              <a:t>ADMINISTERED THROUGH THE COMPETENCY ADVANCEMENT ACADEMY</a:t>
+            </a:r>
+          </a:p>
+        </p:txBody>
+      </p:sp>
+      <p:sp>
+        <p:nvSpPr>
+          <p:cNvPr id="6" name="TextBox 5"/>
+          <p:cNvSpPr txBox="1"/>
+          <p:nvPr/>
+        </p:nvSpPr>
+        <p:spPr>
+          <a:xfrm>
+            <a:off x="5992063" y="310896"/>
+            <a:ext cx="5669280" cy="127381"/>
+          </a:xfrm>
+          <a:prstGeom prst="rect">
+            <a:avLst/>
+          </a:prstGeom>
+          <a:noFill/>
+        </p:spPr>
+        <p:txBody>
+          <a:bodyPr wrap="square" anchor="t" lIns="0" rIns="0" tIns="0" bIns="0">
+            <a:spAutoFit/>
+          </a:bodyPr>
+          <a:lstStyle/>
+          <a:p>
+            <a:pPr algn="r"/>
+            <a:r>
+              <a:rPr sz="550" b="1" i="0" spc="300">
+                <a:solidFill>
+                  <a:srgbClr val="6B6690"/>
+                </a:solidFill>
+                <a:latin typeface="Calibri"/>
+              </a:rPr>
+              <a:t>WEEK 1  ·  DAY 4  ·  KALPA GLOBAL CAPABILITY CENTRE</a:t>
+            </a:r>
+          </a:p>
+        </p:txBody>
+      </p:sp>
+      <p:sp>
+        <p:nvSpPr>
+          <p:cNvPr id="7" name="TextBox 6"/>
+          <p:cNvSpPr txBox="1"/>
+          <p:nvPr/>
+        </p:nvSpPr>
+        <p:spPr>
+          <a:xfrm>
+            <a:off x="530352" y="676656"/>
+            <a:ext cx="11130991" cy="512064"/>
+          </a:xfrm>
+          <a:prstGeom prst="rect">
+            <a:avLst/>
+          </a:prstGeom>
+          <a:noFill/>
+        </p:spPr>
+        <p:txBody>
+          <a:bodyPr wrap="square" anchor="b" lIns="0" rIns="0" tIns="0" bIns="0">
+            <a:spAutoFit/>
+          </a:bodyPr>
+          <a:lstStyle/>
+          <a:p>
+            <a:pPr algn="l"/>
+            <a:r>
+              <a:rPr sz="2600" b="0" i="0">
+                <a:solidFill>
+                  <a:srgbClr val="1A0F5C"/>
+                </a:solidFill>
+                <a:latin typeface="Georgia"/>
+              </a:rPr>
               <a:t>Why it is wrong: the share was counted under chance</a:t>
             </a:r>
           </a:p>
@@ -14628,7 +16097,7 @@
                 </a:solidFill>
                 <a:latin typeface="Calibri"/>
               </a:rPr>
-              <a:t>S14  ·  17 / 44</a:t>
+              <a:t>S15  ·  18 / 44</a:t>
             </a:r>
           </a:p>
         </p:txBody>
@@ -14641,7 +16110,7 @@
 </p:sld>
 </file>
 
-<file path=ppt/slides/slide18.xml><?xml version="1.0" encoding="utf-8"?>
+<file path=ppt/slides/slide19.xml><?xml version="1.0" encoding="utf-8"?>
 <p:sld xmlns:a="http://schemas.openxmlformats.org/drawingml/2006/main" xmlns:p="http://schemas.openxmlformats.org/presentationml/2006/main" xmlns:r="http://schemas.openxmlformats.org/officeDocument/2006/relationships">
   <p:cSld>
     <p:spTree>
@@ -15621,1460 +17090,6 @@
                 </a:solidFill>
                 <a:latin typeface="Calibri"/>
               </a:rPr>
-              <a:t>S15  ·  18 / 44</a:t>
-            </a:r>
-          </a:p>
-        </p:txBody>
-      </p:sp>
-    </p:spTree>
-  </p:cSld>
-  <p:clrMapOvr>
-    <a:masterClrMapping/>
-  </p:clrMapOvr>
-</p:sld>
-</file>
-
-<file path=ppt/slides/slide19.xml><?xml version="1.0" encoding="utf-8"?>
-<p:sld xmlns:a="http://schemas.openxmlformats.org/drawingml/2006/main" xmlns:p="http://schemas.openxmlformats.org/presentationml/2006/main" xmlns:r="http://schemas.openxmlformats.org/officeDocument/2006/relationships">
-  <p:cSld>
-    <p:spTree>
-      <p:nvGrpSpPr>
-        <p:cNvPr id="1" name=""/>
-        <p:cNvGrpSpPr/>
-        <p:nvPr/>
-      </p:nvGrpSpPr>
-      <p:grpSpPr/>
-      <p:pic>
-        <p:nvPicPr>
-          <p:cNvPr id="2" name="Picture 1" descr="bg_light.jpg"/>
-          <p:cNvPicPr>
-            <a:picLocks noChangeAspect="1"/>
-          </p:cNvPicPr>
-          <p:nvPr/>
-        </p:nvPicPr>
-        <p:blipFill>
-          <a:blip r:embed="rId2"/>
-          <a:stretch>
-            <a:fillRect/>
-          </a:stretch>
-        </p:blipFill>
-        <p:spPr>
-          <a:xfrm>
-            <a:off x="0" y="0"/>
-            <a:ext cx="12191695" cy="6858000"/>
-          </a:xfrm>
-          <a:prstGeom prst="rect">
-            <a:avLst/>
-          </a:prstGeom>
-        </p:spPr>
-      </p:pic>
-      <p:pic>
-        <p:nvPicPr>
-          <p:cNvPr id="3" name="Picture 2" descr="iitgn_logo.png"/>
-          <p:cNvPicPr>
-            <a:picLocks noChangeAspect="1"/>
-          </p:cNvPicPr>
-          <p:nvPr/>
-        </p:nvPicPr>
-        <p:blipFill>
-          <a:blip r:embed="rId3"/>
-          <a:stretch>
-            <a:fillRect/>
-          </a:stretch>
-        </p:blipFill>
-        <p:spPr>
-          <a:xfrm>
-            <a:off x="530352" y="201168"/>
-            <a:ext cx="420624" cy="420624"/>
-          </a:xfrm>
-          <a:prstGeom prst="rect">
-            <a:avLst/>
-          </a:prstGeom>
-        </p:spPr>
-      </p:pic>
-      <p:sp>
-        <p:nvSpPr>
-          <p:cNvPr id="4" name="TextBox 3"/>
-          <p:cNvSpPr txBox="1"/>
-          <p:nvPr/>
-        </p:nvSpPr>
-        <p:spPr>
-          <a:xfrm>
-            <a:off x="1042416" y="228600"/>
-            <a:ext cx="5120640" cy="185166"/>
-          </a:xfrm>
-          <a:prstGeom prst="rect">
-            <a:avLst/>
-          </a:prstGeom>
-          <a:noFill/>
-        </p:spPr>
-        <p:txBody>
-          <a:bodyPr wrap="square" anchor="t" lIns="0" rIns="0" tIns="0" bIns="0">
-            <a:spAutoFit/>
-          </a:bodyPr>
-          <a:lstStyle/>
-          <a:p>
-            <a:pPr algn="l"/>
-            <a:r>
-              <a:rPr sz="900" b="1" i="0">
-                <a:solidFill>
-                  <a:srgbClr val="1A0F5C"/>
-                </a:solidFill>
-                <a:latin typeface="Calibri"/>
-              </a:rPr>
-              <a:t>Indian Institute of Technology Gandhinagar</a:t>
-            </a:r>
-          </a:p>
-        </p:txBody>
-      </p:sp>
-      <p:sp>
-        <p:nvSpPr>
-          <p:cNvPr id="5" name="TextBox 4"/>
-          <p:cNvSpPr txBox="1"/>
-          <p:nvPr/>
-        </p:nvSpPr>
-        <p:spPr>
-          <a:xfrm>
-            <a:off x="1042416" y="420623"/>
-            <a:ext cx="5852160" cy="127381"/>
-          </a:xfrm>
-          <a:prstGeom prst="rect">
-            <a:avLst/>
-          </a:prstGeom>
-          <a:noFill/>
-        </p:spPr>
-        <p:txBody>
-          <a:bodyPr wrap="square" anchor="t" lIns="0" rIns="0" tIns="0" bIns="0">
-            <a:spAutoFit/>
-          </a:bodyPr>
-          <a:lstStyle/>
-          <a:p>
-            <a:pPr algn="l"/>
-            <a:r>
-              <a:rPr sz="550" b="1" i="0" spc="300">
-                <a:solidFill>
-                  <a:srgbClr val="6B6690"/>
-                </a:solidFill>
-                <a:latin typeface="Calibri"/>
-              </a:rPr>
-              <a:t>ADMINISTERED THROUGH THE COMPETENCY ADVANCEMENT ACADEMY</a:t>
-            </a:r>
-          </a:p>
-        </p:txBody>
-      </p:sp>
-      <p:sp>
-        <p:nvSpPr>
-          <p:cNvPr id="6" name="TextBox 5"/>
-          <p:cNvSpPr txBox="1"/>
-          <p:nvPr/>
-        </p:nvSpPr>
-        <p:spPr>
-          <a:xfrm>
-            <a:off x="5992063" y="310896"/>
-            <a:ext cx="5669280" cy="127381"/>
-          </a:xfrm>
-          <a:prstGeom prst="rect">
-            <a:avLst/>
-          </a:prstGeom>
-          <a:noFill/>
-        </p:spPr>
-        <p:txBody>
-          <a:bodyPr wrap="square" anchor="t" lIns="0" rIns="0" tIns="0" bIns="0">
-            <a:spAutoFit/>
-          </a:bodyPr>
-          <a:lstStyle/>
-          <a:p>
-            <a:pPr algn="r"/>
-            <a:r>
-              <a:rPr sz="550" b="1" i="0" spc="300">
-                <a:solidFill>
-                  <a:srgbClr val="6B6690"/>
-                </a:solidFill>
-                <a:latin typeface="Calibri"/>
-              </a:rPr>
-              <a:t>WEEK 1  ·  DAY 4  ·  KALPA GLOBAL CAPABILITY CENTRE</a:t>
-            </a:r>
-          </a:p>
-        </p:txBody>
-      </p:sp>
-      <p:sp>
-        <p:nvSpPr>
-          <p:cNvPr id="7" name="TextBox 6"/>
-          <p:cNvSpPr txBox="1"/>
-          <p:nvPr/>
-        </p:nvSpPr>
-        <p:spPr>
-          <a:xfrm>
-            <a:off x="530352" y="676656"/>
-            <a:ext cx="11130991" cy="512064"/>
-          </a:xfrm>
-          <a:prstGeom prst="rect">
-            <a:avLst/>
-          </a:prstGeom>
-          <a:noFill/>
-        </p:spPr>
-        <p:txBody>
-          <a:bodyPr wrap="square" anchor="b" lIns="0" rIns="0" tIns="0" bIns="0">
-            <a:spAutoFit/>
-          </a:bodyPr>
-          <a:lstStyle/>
-          <a:p>
-            <a:pPr algn="l"/>
-            <a:r>
-              <a:rPr sz="2600" b="0" i="0">
-                <a:solidFill>
-                  <a:srgbClr val="1A0F5C"/>
-                </a:solidFill>
-                <a:latin typeface="Georgia"/>
-              </a:rPr>
-              <a:t>Your turn: Retail-Plus, 5,000 shuffles</a:t>
-            </a:r>
-          </a:p>
-        </p:txBody>
-      </p:sp>
-      <p:sp>
-        <p:nvSpPr>
-          <p:cNvPr id="8" name="TextBox 7"/>
-          <p:cNvSpPr txBox="1"/>
-          <p:nvPr/>
-        </p:nvSpPr>
-        <p:spPr>
-          <a:xfrm>
-            <a:off x="530352" y="1243584"/>
-            <a:ext cx="11130991" cy="234696"/>
-          </a:xfrm>
-          <a:prstGeom prst="rect">
-            <a:avLst/>
-          </a:prstGeom>
-          <a:noFill/>
-        </p:spPr>
-        <p:txBody>
-          <a:bodyPr wrap="square" anchor="t" lIns="0" rIns="0" tIns="0" bIns="0">
-            <a:spAutoFit/>
-          </a:bodyPr>
-          <a:lstStyle/>
-          <a:p>
-            <a:pPr algn="l"/>
-            <a:r>
-              <a:rPr sz="1200" b="0" i="0">
-                <a:solidFill>
-                  <a:srgbClr val="6B6690"/>
-                </a:solidFill>
-                <a:latin typeface="Calibri"/>
-              </a:rPr>
-              <a:t>The same loop on the segment Meera asked about, run by the room, with the sentence written after.</a:t>
-            </a:r>
-          </a:p>
-        </p:txBody>
-      </p:sp>
-      <p:sp>
-        <p:nvSpPr>
-          <p:cNvPr id="9" name="Rectangle 8"/>
-          <p:cNvSpPr/>
-          <p:nvPr/>
-        </p:nvSpPr>
-        <p:spPr>
-          <a:xfrm>
-            <a:off x="1853145" y="2523744"/>
-            <a:ext cx="8485403" cy="18288"/>
-          </a:xfrm>
-          <a:prstGeom prst="rect">
-            <a:avLst/>
-          </a:prstGeom>
-          <a:solidFill>
-            <a:srgbClr val="CFC9EE"/>
-          </a:solidFill>
-          <a:ln>
-            <a:noFill/>
-          </a:ln>
-          <a:effectLst/>
-        </p:spPr>
-        <p:style>
-          <a:lnRef idx="1">
-            <a:schemeClr val="accent1"/>
-          </a:lnRef>
-          <a:fillRef idx="3">
-            <a:schemeClr val="accent1"/>
-          </a:fillRef>
-          <a:effectRef idx="2">
-            <a:schemeClr val="accent1"/>
-          </a:effectRef>
-          <a:fontRef idx="minor">
-            <a:schemeClr val="lt1"/>
-          </a:fontRef>
-        </p:style>
-        <p:txBody>
-          <a:bodyPr rtlCol="0" anchor="ctr" wrap="square"/>
-          <a:lstStyle/>
-          <a:p>
-            <a:pPr algn="ctr"/>
-          </a:p>
-        </p:txBody>
-      </p:sp>
-      <p:sp>
-        <p:nvSpPr>
-          <p:cNvPr id="10" name="TextBox 9"/>
-          <p:cNvSpPr txBox="1"/>
-          <p:nvPr/>
-        </p:nvSpPr>
-        <p:spPr>
-          <a:xfrm>
-            <a:off x="530352" y="1956816"/>
-            <a:ext cx="2645587" cy="168656"/>
-          </a:xfrm>
-          <a:prstGeom prst="rect">
-            <a:avLst/>
-          </a:prstGeom>
-          <a:noFill/>
-        </p:spPr>
-        <p:txBody>
-          <a:bodyPr wrap="square" anchor="t" lIns="0" rIns="0" tIns="0" bIns="0">
-            <a:spAutoFit/>
-          </a:bodyPr>
-          <a:lstStyle/>
-          <a:p>
-            <a:pPr algn="ctr"/>
-            <a:r>
-              <a:rPr sz="800" b="1" i="0" spc="250">
-                <a:solidFill>
-                  <a:srgbClr val="5B3FD6"/>
-                </a:solidFill>
-                <a:latin typeface="Calibri"/>
-              </a:rPr>
-              <a:t>STEP 1</a:t>
-            </a:r>
-          </a:p>
-        </p:txBody>
-      </p:sp>
-      <p:sp>
-        <p:nvSpPr>
-          <p:cNvPr id="11" name="Oval 10"/>
-          <p:cNvSpPr/>
-          <p:nvPr/>
-        </p:nvSpPr>
-        <p:spPr>
-          <a:xfrm>
-            <a:off x="1752561" y="2432304"/>
-            <a:ext cx="201168" cy="201168"/>
-          </a:xfrm>
-          <a:prstGeom prst="ellipse">
-            <a:avLst/>
-          </a:prstGeom>
-          <a:solidFill>
-            <a:srgbClr val="5B3FD6"/>
-          </a:solidFill>
-          <a:ln>
-            <a:noFill/>
-          </a:ln>
-          <a:effectLst/>
-        </p:spPr>
-        <p:style>
-          <a:lnRef idx="1">
-            <a:schemeClr val="accent1"/>
-          </a:lnRef>
-          <a:fillRef idx="3">
-            <a:schemeClr val="accent1"/>
-          </a:fillRef>
-          <a:effectRef idx="2">
-            <a:schemeClr val="accent1"/>
-          </a:effectRef>
-          <a:fontRef idx="minor">
-            <a:schemeClr val="lt1"/>
-          </a:fontRef>
-        </p:style>
-        <p:txBody>
-          <a:bodyPr rtlCol="0" anchor="ctr" wrap="square"/>
-          <a:lstStyle/>
-          <a:p>
-            <a:pPr algn="ctr"/>
-          </a:p>
-        </p:txBody>
-      </p:sp>
-      <p:sp>
-        <p:nvSpPr>
-          <p:cNvPr id="12" name="Rounded Rectangle 11"/>
-          <p:cNvSpPr/>
-          <p:nvPr/>
-        </p:nvSpPr>
-        <p:spPr>
-          <a:xfrm>
-            <a:off x="530352" y="2843784"/>
-            <a:ext cx="2645587" cy="1249680"/>
-          </a:xfrm>
-          <a:prstGeom prst="roundRect">
-            <a:avLst>
-              <a:gd name="adj" fmla="val 5000"/>
-            </a:avLst>
-          </a:prstGeom>
-          <a:solidFill>
-            <a:srgbClr val="FFFFFF"/>
-          </a:solidFill>
-          <a:ln w="9525">
-            <a:solidFill>
-              <a:srgbClr val="E4E1F1"/>
-            </a:solidFill>
-          </a:ln>
-          <a:effectLst>
-            <a:outerShdw blurRad="76200" dist="19050" dir="5400000" algn="bl" rotWithShape="0">
-              <a:srgbClr val="1A0F5C">
-                <a:alpha val="12000"/>
-              </a:srgbClr>
-            </a:outerShdw>
-          </a:effectLst>
-        </p:spPr>
-        <p:style>
-          <a:lnRef idx="1">
-            <a:schemeClr val="accent1"/>
-          </a:lnRef>
-          <a:fillRef idx="3">
-            <a:schemeClr val="accent1"/>
-          </a:fillRef>
-          <a:effectRef idx="2">
-            <a:schemeClr val="accent1"/>
-          </a:effectRef>
-          <a:fontRef idx="minor">
-            <a:schemeClr val="lt1"/>
-          </a:fontRef>
-        </p:style>
-        <p:txBody>
-          <a:bodyPr rtlCol="0" anchor="ctr" wrap="square"/>
-          <a:lstStyle/>
-          <a:p>
-            <a:pPr algn="ctr"/>
-          </a:p>
-        </p:txBody>
-      </p:sp>
-      <p:sp>
-        <p:nvSpPr>
-          <p:cNvPr id="13" name="TextBox 12"/>
-          <p:cNvSpPr txBox="1"/>
-          <p:nvPr/>
-        </p:nvSpPr>
-        <p:spPr>
-          <a:xfrm>
-            <a:off x="694944" y="2990088"/>
-            <a:ext cx="2316403" cy="251205"/>
-          </a:xfrm>
-          <a:prstGeom prst="rect">
-            <a:avLst/>
-          </a:prstGeom>
-          <a:noFill/>
-        </p:spPr>
-        <p:txBody>
-          <a:bodyPr wrap="square" anchor="t" lIns="0" rIns="0" tIns="0" bIns="0">
-            <a:spAutoFit/>
-          </a:bodyPr>
-          <a:lstStyle/>
-          <a:p>
-            <a:pPr algn="l"/>
-            <a:r>
-              <a:rPr sz="1300" b="1" i="0">
-                <a:solidFill>
-                  <a:srgbClr val="1A0F5C"/>
-                </a:solidFill>
-                <a:latin typeface="Calibri"/>
-              </a:rPr>
-              <a:t>The measure</a:t>
-            </a:r>
-          </a:p>
-        </p:txBody>
-      </p:sp>
-      <p:sp>
-        <p:nvSpPr>
-          <p:cNvPr id="14" name="TextBox 13"/>
-          <p:cNvSpPr txBox="1"/>
-          <p:nvPr/>
-        </p:nvSpPr>
-        <p:spPr>
-          <a:xfrm>
-            <a:off x="694944" y="3277870"/>
-            <a:ext cx="2316403" cy="531876"/>
-          </a:xfrm>
-          <a:prstGeom prst="rect">
-            <a:avLst/>
-          </a:prstGeom>
-          <a:noFill/>
-        </p:spPr>
-        <p:txBody>
-          <a:bodyPr wrap="square" anchor="t" lIns="0" rIns="0" tIns="0" bIns="0">
-            <a:spAutoFit/>
-          </a:bodyPr>
-          <a:lstStyle/>
-          <a:p>
-            <a:pPr algn="l"/>
-            <a:r>
-              <a:rPr sz="1000" b="0" i="0">
-                <a:solidFill>
-                  <a:srgbClr val="6B6690"/>
-                </a:solidFill>
-                <a:latin typeface="Calibri"/>
-              </a:rPr>
-              <a:t>Delivered revenue per Retail-Plus member, Q1 and Q2, from notebook 1, level 4.</a:t>
-            </a:r>
-          </a:p>
-        </p:txBody>
-      </p:sp>
-      <p:sp>
-        <p:nvSpPr>
-          <p:cNvPr id="15" name="TextBox 14"/>
-          <p:cNvSpPr txBox="1"/>
-          <p:nvPr/>
-        </p:nvSpPr>
-        <p:spPr>
-          <a:xfrm>
-            <a:off x="3358819" y="1956816"/>
-            <a:ext cx="2645587" cy="168656"/>
-          </a:xfrm>
-          <a:prstGeom prst="rect">
-            <a:avLst/>
-          </a:prstGeom>
-          <a:noFill/>
-        </p:spPr>
-        <p:txBody>
-          <a:bodyPr wrap="square" anchor="t" lIns="0" rIns="0" tIns="0" bIns="0">
-            <a:spAutoFit/>
-          </a:bodyPr>
-          <a:lstStyle/>
-          <a:p>
-            <a:pPr algn="ctr"/>
-            <a:r>
-              <a:rPr sz="800" b="1" i="0" spc="250">
-                <a:solidFill>
-                  <a:srgbClr val="5B3FD6"/>
-                </a:solidFill>
-                <a:latin typeface="Calibri"/>
-              </a:rPr>
-              <a:t>STEP 2</a:t>
-            </a:r>
-          </a:p>
-        </p:txBody>
-      </p:sp>
-      <p:sp>
-        <p:nvSpPr>
-          <p:cNvPr id="16" name="Oval 15"/>
-          <p:cNvSpPr/>
-          <p:nvPr/>
-        </p:nvSpPr>
-        <p:spPr>
-          <a:xfrm>
-            <a:off x="4581029" y="2432304"/>
-            <a:ext cx="201168" cy="201168"/>
-          </a:xfrm>
-          <a:prstGeom prst="ellipse">
-            <a:avLst/>
-          </a:prstGeom>
-          <a:solidFill>
-            <a:srgbClr val="5B3FD6"/>
-          </a:solidFill>
-          <a:ln>
-            <a:noFill/>
-          </a:ln>
-          <a:effectLst/>
-        </p:spPr>
-        <p:style>
-          <a:lnRef idx="1">
-            <a:schemeClr val="accent1"/>
-          </a:lnRef>
-          <a:fillRef idx="3">
-            <a:schemeClr val="accent1"/>
-          </a:fillRef>
-          <a:effectRef idx="2">
-            <a:schemeClr val="accent1"/>
-          </a:effectRef>
-          <a:fontRef idx="minor">
-            <a:schemeClr val="lt1"/>
-          </a:fontRef>
-        </p:style>
-        <p:txBody>
-          <a:bodyPr rtlCol="0" anchor="ctr" wrap="square"/>
-          <a:lstStyle/>
-          <a:p>
-            <a:pPr algn="ctr"/>
-          </a:p>
-        </p:txBody>
-      </p:sp>
-      <p:sp>
-        <p:nvSpPr>
-          <p:cNvPr id="17" name="Rounded Rectangle 16"/>
-          <p:cNvSpPr/>
-          <p:nvPr/>
-        </p:nvSpPr>
-        <p:spPr>
-          <a:xfrm>
-            <a:off x="3358819" y="2843784"/>
-            <a:ext cx="2645587" cy="1249680"/>
-          </a:xfrm>
-          <a:prstGeom prst="roundRect">
-            <a:avLst>
-              <a:gd name="adj" fmla="val 5000"/>
-            </a:avLst>
-          </a:prstGeom>
-          <a:solidFill>
-            <a:srgbClr val="FFFFFF"/>
-          </a:solidFill>
-          <a:ln w="9525">
-            <a:solidFill>
-              <a:srgbClr val="E4E1F1"/>
-            </a:solidFill>
-          </a:ln>
-          <a:effectLst>
-            <a:outerShdw blurRad="76200" dist="19050" dir="5400000" algn="bl" rotWithShape="0">
-              <a:srgbClr val="1A0F5C">
-                <a:alpha val="12000"/>
-              </a:srgbClr>
-            </a:outerShdw>
-          </a:effectLst>
-        </p:spPr>
-        <p:style>
-          <a:lnRef idx="1">
-            <a:schemeClr val="accent1"/>
-          </a:lnRef>
-          <a:fillRef idx="3">
-            <a:schemeClr val="accent1"/>
-          </a:fillRef>
-          <a:effectRef idx="2">
-            <a:schemeClr val="accent1"/>
-          </a:effectRef>
-          <a:fontRef idx="minor">
-            <a:schemeClr val="lt1"/>
-          </a:fontRef>
-        </p:style>
-        <p:txBody>
-          <a:bodyPr rtlCol="0" anchor="ctr" wrap="square"/>
-          <a:lstStyle/>
-          <a:p>
-            <a:pPr algn="ctr"/>
-          </a:p>
-        </p:txBody>
-      </p:sp>
-      <p:sp>
-        <p:nvSpPr>
-          <p:cNvPr id="18" name="TextBox 17"/>
-          <p:cNvSpPr txBox="1"/>
-          <p:nvPr/>
-        </p:nvSpPr>
-        <p:spPr>
-          <a:xfrm>
-            <a:off x="3523411" y="2990088"/>
-            <a:ext cx="2316403" cy="251205"/>
-          </a:xfrm>
-          <a:prstGeom prst="rect">
-            <a:avLst/>
-          </a:prstGeom>
-          <a:noFill/>
-        </p:spPr>
-        <p:txBody>
-          <a:bodyPr wrap="square" anchor="t" lIns="0" rIns="0" tIns="0" bIns="0">
-            <a:spAutoFit/>
-          </a:bodyPr>
-          <a:lstStyle/>
-          <a:p>
-            <a:pPr algn="l"/>
-            <a:r>
-              <a:rPr sz="1300" b="1" i="0">
-                <a:solidFill>
-                  <a:srgbClr val="1A0F5C"/>
-                </a:solidFill>
-                <a:latin typeface="Calibri"/>
-              </a:rPr>
-              <a:t>The real gap</a:t>
-            </a:r>
-          </a:p>
-        </p:txBody>
-      </p:sp>
-      <p:sp>
-        <p:nvSpPr>
-          <p:cNvPr id="19" name="TextBox 18"/>
-          <p:cNvSpPr txBox="1"/>
-          <p:nvPr/>
-        </p:nvSpPr>
-        <p:spPr>
-          <a:xfrm>
-            <a:off x="3523411" y="3277870"/>
-            <a:ext cx="2316403" cy="366776"/>
-          </a:xfrm>
-          <a:prstGeom prst="rect">
-            <a:avLst/>
-          </a:prstGeom>
-          <a:noFill/>
-        </p:spPr>
-        <p:txBody>
-          <a:bodyPr wrap="square" anchor="t" lIns="0" rIns="0" tIns="0" bIns="0">
-            <a:spAutoFit/>
-          </a:bodyPr>
-          <a:lstStyle/>
-          <a:p>
-            <a:pPr algn="l"/>
-            <a:r>
-              <a:rPr sz="1000" b="0" i="0">
-                <a:solidFill>
-                  <a:srgbClr val="6B6690"/>
-                </a:solidFill>
-                <a:latin typeface="Calibri"/>
-              </a:rPr>
-              <a:t>Q1 mean less Q2 mean, printed in rupees before any shuffle runs.</a:t>
-            </a:r>
-          </a:p>
-        </p:txBody>
-      </p:sp>
-      <p:sp>
-        <p:nvSpPr>
-          <p:cNvPr id="20" name="TextBox 19"/>
-          <p:cNvSpPr txBox="1"/>
-          <p:nvPr/>
-        </p:nvSpPr>
-        <p:spPr>
-          <a:xfrm>
-            <a:off x="6187287" y="1956816"/>
-            <a:ext cx="2645587" cy="168656"/>
-          </a:xfrm>
-          <a:prstGeom prst="rect">
-            <a:avLst/>
-          </a:prstGeom>
-          <a:noFill/>
-        </p:spPr>
-        <p:txBody>
-          <a:bodyPr wrap="square" anchor="t" lIns="0" rIns="0" tIns="0" bIns="0">
-            <a:spAutoFit/>
-          </a:bodyPr>
-          <a:lstStyle/>
-          <a:p>
-            <a:pPr algn="ctr"/>
-            <a:r>
-              <a:rPr sz="800" b="1" i="0" spc="250">
-                <a:solidFill>
-                  <a:srgbClr val="5B3FD6"/>
-                </a:solidFill>
-                <a:latin typeface="Calibri"/>
-              </a:rPr>
-              <a:t>STEP 3</a:t>
-            </a:r>
-          </a:p>
-        </p:txBody>
-      </p:sp>
-      <p:sp>
-        <p:nvSpPr>
-          <p:cNvPr id="21" name="Oval 20"/>
-          <p:cNvSpPr/>
-          <p:nvPr/>
-        </p:nvSpPr>
-        <p:spPr>
-          <a:xfrm>
-            <a:off x="7409497" y="2432304"/>
-            <a:ext cx="201168" cy="201168"/>
-          </a:xfrm>
-          <a:prstGeom prst="ellipse">
-            <a:avLst/>
-          </a:prstGeom>
-          <a:solidFill>
-            <a:srgbClr val="5B3FD6"/>
-          </a:solidFill>
-          <a:ln>
-            <a:noFill/>
-          </a:ln>
-          <a:effectLst/>
-        </p:spPr>
-        <p:style>
-          <a:lnRef idx="1">
-            <a:schemeClr val="accent1"/>
-          </a:lnRef>
-          <a:fillRef idx="3">
-            <a:schemeClr val="accent1"/>
-          </a:fillRef>
-          <a:effectRef idx="2">
-            <a:schemeClr val="accent1"/>
-          </a:effectRef>
-          <a:fontRef idx="minor">
-            <a:schemeClr val="lt1"/>
-          </a:fontRef>
-        </p:style>
-        <p:txBody>
-          <a:bodyPr rtlCol="0" anchor="ctr" wrap="square"/>
-          <a:lstStyle/>
-          <a:p>
-            <a:pPr algn="ctr"/>
-          </a:p>
-        </p:txBody>
-      </p:sp>
-      <p:sp>
-        <p:nvSpPr>
-          <p:cNvPr id="22" name="Rounded Rectangle 21"/>
-          <p:cNvSpPr/>
-          <p:nvPr/>
-        </p:nvSpPr>
-        <p:spPr>
-          <a:xfrm>
-            <a:off x="6187287" y="2843784"/>
-            <a:ext cx="2645587" cy="1249680"/>
-          </a:xfrm>
-          <a:prstGeom prst="roundRect">
-            <a:avLst>
-              <a:gd name="adj" fmla="val 5000"/>
-            </a:avLst>
-          </a:prstGeom>
-          <a:solidFill>
-            <a:srgbClr val="FFFFFF"/>
-          </a:solidFill>
-          <a:ln w="9525">
-            <a:solidFill>
-              <a:srgbClr val="E4E1F1"/>
-            </a:solidFill>
-          </a:ln>
-          <a:effectLst>
-            <a:outerShdw blurRad="76200" dist="19050" dir="5400000" algn="bl" rotWithShape="0">
-              <a:srgbClr val="1A0F5C">
-                <a:alpha val="12000"/>
-              </a:srgbClr>
-            </a:outerShdw>
-          </a:effectLst>
-        </p:spPr>
-        <p:style>
-          <a:lnRef idx="1">
-            <a:schemeClr val="accent1"/>
-          </a:lnRef>
-          <a:fillRef idx="3">
-            <a:schemeClr val="accent1"/>
-          </a:fillRef>
-          <a:effectRef idx="2">
-            <a:schemeClr val="accent1"/>
-          </a:effectRef>
-          <a:fontRef idx="minor">
-            <a:schemeClr val="lt1"/>
-          </a:fontRef>
-        </p:style>
-        <p:txBody>
-          <a:bodyPr rtlCol="0" anchor="ctr" wrap="square"/>
-          <a:lstStyle/>
-          <a:p>
-            <a:pPr algn="ctr"/>
-          </a:p>
-        </p:txBody>
-      </p:sp>
-      <p:sp>
-        <p:nvSpPr>
-          <p:cNvPr id="23" name="TextBox 22"/>
-          <p:cNvSpPr txBox="1"/>
-          <p:nvPr/>
-        </p:nvSpPr>
-        <p:spPr>
-          <a:xfrm>
-            <a:off x="6351879" y="2990088"/>
-            <a:ext cx="2316403" cy="251205"/>
-          </a:xfrm>
-          <a:prstGeom prst="rect">
-            <a:avLst/>
-          </a:prstGeom>
-          <a:noFill/>
-        </p:spPr>
-        <p:txBody>
-          <a:bodyPr wrap="square" anchor="t" lIns="0" rIns="0" tIns="0" bIns="0">
-            <a:spAutoFit/>
-          </a:bodyPr>
-          <a:lstStyle/>
-          <a:p>
-            <a:pPr algn="l"/>
-            <a:r>
-              <a:rPr sz="1300" b="1" i="0">
-                <a:solidFill>
-                  <a:srgbClr val="1A0F5C"/>
-                </a:solidFill>
-                <a:latin typeface="Calibri"/>
-              </a:rPr>
-              <a:t>The shuffles</a:t>
-            </a:r>
-          </a:p>
-        </p:txBody>
-      </p:sp>
-      <p:sp>
-        <p:nvSpPr>
-          <p:cNvPr id="24" name="TextBox 23"/>
-          <p:cNvSpPr txBox="1"/>
-          <p:nvPr/>
-        </p:nvSpPr>
-        <p:spPr>
-          <a:xfrm>
-            <a:off x="6351879" y="3277870"/>
-            <a:ext cx="2316403" cy="366776"/>
-          </a:xfrm>
-          <a:prstGeom prst="rect">
-            <a:avLst/>
-          </a:prstGeom>
-          <a:noFill/>
-        </p:spPr>
-        <p:txBody>
-          <a:bodyPr wrap="square" anchor="t" lIns="0" rIns="0" tIns="0" bIns="0">
-            <a:spAutoFit/>
-          </a:bodyPr>
-          <a:lstStyle/>
-          <a:p>
-            <a:pPr algn="l"/>
-            <a:r>
-              <a:rPr sz="1000" b="0" i="0">
-                <a:solidFill>
-                  <a:srgbClr val="6B6690"/>
-                </a:solidFill>
-                <a:latin typeface="Calibri"/>
-              </a:rPr>
-              <a:t>5,000, seed 2026, and the share at least as large as the real gap.</a:t>
-            </a:r>
-          </a:p>
-        </p:txBody>
-      </p:sp>
-      <p:sp>
-        <p:nvSpPr>
-          <p:cNvPr id="25" name="TextBox 24"/>
-          <p:cNvSpPr txBox="1"/>
-          <p:nvPr/>
-        </p:nvSpPr>
-        <p:spPr>
-          <a:xfrm>
-            <a:off x="9015755" y="1956816"/>
-            <a:ext cx="2645587" cy="168656"/>
-          </a:xfrm>
-          <a:prstGeom prst="rect">
-            <a:avLst/>
-          </a:prstGeom>
-          <a:noFill/>
-        </p:spPr>
-        <p:txBody>
-          <a:bodyPr wrap="square" anchor="t" lIns="0" rIns="0" tIns="0" bIns="0">
-            <a:spAutoFit/>
-          </a:bodyPr>
-          <a:lstStyle/>
-          <a:p>
-            <a:pPr algn="ctr"/>
-            <a:r>
-              <a:rPr sz="800" b="1" i="0" spc="250">
-                <a:solidFill>
-                  <a:srgbClr val="5B3FD6"/>
-                </a:solidFill>
-                <a:latin typeface="Calibri"/>
-              </a:rPr>
-              <a:t>STEP 4</a:t>
-            </a:r>
-          </a:p>
-        </p:txBody>
-      </p:sp>
-      <p:sp>
-        <p:nvSpPr>
-          <p:cNvPr id="26" name="Oval 25"/>
-          <p:cNvSpPr/>
-          <p:nvPr/>
-        </p:nvSpPr>
-        <p:spPr>
-          <a:xfrm>
-            <a:off x="10237965" y="2432304"/>
-            <a:ext cx="201168" cy="201168"/>
-          </a:xfrm>
-          <a:prstGeom prst="ellipse">
-            <a:avLst/>
-          </a:prstGeom>
-          <a:solidFill>
-            <a:srgbClr val="D9A7FF"/>
-          </a:solidFill>
-          <a:ln>
-            <a:noFill/>
-          </a:ln>
-          <a:effectLst/>
-        </p:spPr>
-        <p:style>
-          <a:lnRef idx="1">
-            <a:schemeClr val="accent1"/>
-          </a:lnRef>
-          <a:fillRef idx="3">
-            <a:schemeClr val="accent1"/>
-          </a:fillRef>
-          <a:effectRef idx="2">
-            <a:schemeClr val="accent1"/>
-          </a:effectRef>
-          <a:fontRef idx="minor">
-            <a:schemeClr val="lt1"/>
-          </a:fontRef>
-        </p:style>
-        <p:txBody>
-          <a:bodyPr rtlCol="0" anchor="ctr" wrap="square"/>
-          <a:lstStyle/>
-          <a:p>
-            <a:pPr algn="ctr"/>
-          </a:p>
-        </p:txBody>
-      </p:sp>
-      <p:sp>
-        <p:nvSpPr>
-          <p:cNvPr id="27" name="Rounded Rectangle 26"/>
-          <p:cNvSpPr/>
-          <p:nvPr/>
-        </p:nvSpPr>
-        <p:spPr>
-          <a:xfrm>
-            <a:off x="9015755" y="2843784"/>
-            <a:ext cx="2645587" cy="1249680"/>
-          </a:xfrm>
-          <a:prstGeom prst="roundRect">
-            <a:avLst>
-              <a:gd name="adj" fmla="val 5000"/>
-            </a:avLst>
-          </a:prstGeom>
-          <a:gradFill rotWithShape="1">
-            <a:gsLst>
-              <a:gs pos="0">
-                <a:srgbClr val="2C1A86"/>
-              </a:gs>
-              <a:gs pos="100000">
-                <a:srgbClr val="1A0F5C"/>
-              </a:gs>
-            </a:gsLst>
-            <a:lin scaled="0" ang="16200000"/>
-          </a:gradFill>
-          <a:ln>
-            <a:noFill/>
-          </a:ln>
-          <a:effectLst>
-            <a:outerShdw blurRad="76200" dist="19050" dir="5400000" algn="bl" rotWithShape="0">
-              <a:srgbClr val="1A0F5C">
-                <a:alpha val="12000"/>
-              </a:srgbClr>
-            </a:outerShdw>
-          </a:effectLst>
-        </p:spPr>
-        <p:style>
-          <a:lnRef idx="1">
-            <a:schemeClr val="accent1"/>
-          </a:lnRef>
-          <a:fillRef idx="3">
-            <a:schemeClr val="accent1"/>
-          </a:fillRef>
-          <a:effectRef idx="2">
-            <a:schemeClr val="accent1"/>
-          </a:effectRef>
-          <a:fontRef idx="minor">
-            <a:schemeClr val="lt1"/>
-          </a:fontRef>
-        </p:style>
-        <p:txBody>
-          <a:bodyPr rtlCol="0" anchor="ctr" wrap="square"/>
-          <a:lstStyle/>
-          <a:p>
-            <a:pPr algn="ctr"/>
-          </a:p>
-        </p:txBody>
-      </p:sp>
-      <p:sp>
-        <p:nvSpPr>
-          <p:cNvPr id="28" name="TextBox 27"/>
-          <p:cNvSpPr txBox="1"/>
-          <p:nvPr/>
-        </p:nvSpPr>
-        <p:spPr>
-          <a:xfrm>
-            <a:off x="9180347" y="2990088"/>
-            <a:ext cx="2316403" cy="251205"/>
-          </a:xfrm>
-          <a:prstGeom prst="rect">
-            <a:avLst/>
-          </a:prstGeom>
-          <a:noFill/>
-        </p:spPr>
-        <p:txBody>
-          <a:bodyPr wrap="square" anchor="t" lIns="0" rIns="0" tIns="0" bIns="0">
-            <a:spAutoFit/>
-          </a:bodyPr>
-          <a:lstStyle/>
-          <a:p>
-            <a:pPr algn="l"/>
-            <a:r>
-              <a:rPr sz="1300" b="1" i="0">
-                <a:solidFill>
-                  <a:srgbClr val="FFFFFF"/>
-                </a:solidFill>
-                <a:latin typeface="Calibri"/>
-              </a:rPr>
-              <a:t>The sentence</a:t>
-            </a:r>
-          </a:p>
-        </p:txBody>
-      </p:sp>
-      <p:sp>
-        <p:nvSpPr>
-          <p:cNvPr id="29" name="TextBox 28"/>
-          <p:cNvSpPr txBox="1"/>
-          <p:nvPr/>
-        </p:nvSpPr>
-        <p:spPr>
-          <a:xfrm>
-            <a:off x="9180347" y="3277870"/>
-            <a:ext cx="2316403" cy="366776"/>
-          </a:xfrm>
-          <a:prstGeom prst="rect">
-            <a:avLst/>
-          </a:prstGeom>
-          <a:noFill/>
-        </p:spPr>
-        <p:txBody>
-          <a:bodyPr wrap="square" anchor="t" lIns="0" rIns="0" tIns="0" bIns="0">
-            <a:spAutoFit/>
-          </a:bodyPr>
-          <a:lstStyle/>
-          <a:p>
-            <a:pPr algn="l"/>
-            <a:r>
-              <a:rPr sz="1000" b="0" i="0">
-                <a:solidFill>
-                  <a:srgbClr val="CFC9EE"/>
-                </a:solidFill>
-                <a:latin typeface="Calibri"/>
-              </a:rPr>
-              <a:t>One line in the rewritten form, read aloud to your partner.</a:t>
-            </a:r>
-          </a:p>
-        </p:txBody>
-      </p:sp>
-      <p:sp>
-        <p:nvSpPr>
-          <p:cNvPr id="30" name="Oval 29"/>
-          <p:cNvSpPr/>
-          <p:nvPr/>
-        </p:nvSpPr>
-        <p:spPr>
-          <a:xfrm>
-            <a:off x="530352" y="6492240"/>
-            <a:ext cx="64008" cy="64008"/>
-          </a:xfrm>
-          <a:prstGeom prst="ellipse">
-            <a:avLst/>
-          </a:prstGeom>
-          <a:solidFill>
-            <a:srgbClr val="CFC9EE"/>
-          </a:solidFill>
-          <a:ln>
-            <a:noFill/>
-          </a:ln>
-          <a:effectLst/>
-        </p:spPr>
-        <p:style>
-          <a:lnRef idx="1">
-            <a:schemeClr val="accent1"/>
-          </a:lnRef>
-          <a:fillRef idx="3">
-            <a:schemeClr val="accent1"/>
-          </a:fillRef>
-          <a:effectRef idx="2">
-            <a:schemeClr val="accent1"/>
-          </a:effectRef>
-          <a:fontRef idx="minor">
-            <a:schemeClr val="lt1"/>
-          </a:fontRef>
-        </p:style>
-        <p:txBody>
-          <a:bodyPr rtlCol="0" anchor="ctr" wrap="square"/>
-          <a:lstStyle/>
-          <a:p>
-            <a:pPr algn="ctr"/>
-          </a:p>
-        </p:txBody>
-      </p:sp>
-      <p:sp>
-        <p:nvSpPr>
-          <p:cNvPr id="31" name="TextBox 30"/>
-          <p:cNvSpPr txBox="1"/>
-          <p:nvPr/>
-        </p:nvSpPr>
-        <p:spPr>
-          <a:xfrm>
-            <a:off x="640080" y="6437376"/>
-            <a:ext cx="596360" cy="152146"/>
-          </a:xfrm>
-          <a:prstGeom prst="rect">
-            <a:avLst/>
-          </a:prstGeom>
-          <a:noFill/>
-        </p:spPr>
-        <p:txBody>
-          <a:bodyPr wrap="square" anchor="t" lIns="0" rIns="0" tIns="0" bIns="0">
-            <a:spAutoFit/>
-          </a:bodyPr>
-          <a:lstStyle/>
-          <a:p>
-            <a:pPr algn="l"/>
-            <a:r>
-              <a:rPr sz="700" b="0" i="0">
-                <a:solidFill>
-                  <a:srgbClr val="6B6690"/>
-                </a:solidFill>
-                <a:latin typeface="Calibri"/>
-              </a:rPr>
-              <a:t>The ask</a:t>
-            </a:r>
-          </a:p>
-        </p:txBody>
-      </p:sp>
-      <p:sp>
-        <p:nvSpPr>
-          <p:cNvPr id="32" name="Oval 31"/>
-          <p:cNvSpPr/>
-          <p:nvPr/>
-        </p:nvSpPr>
-        <p:spPr>
-          <a:xfrm>
-            <a:off x="1327880" y="6492240"/>
-            <a:ext cx="64008" cy="64008"/>
-          </a:xfrm>
-          <a:prstGeom prst="ellipse">
-            <a:avLst/>
-          </a:prstGeom>
-          <a:solidFill>
-            <a:srgbClr val="5B3FD6"/>
-          </a:solidFill>
-          <a:ln>
-            <a:noFill/>
-          </a:ln>
-          <a:effectLst/>
-        </p:spPr>
-        <p:style>
-          <a:lnRef idx="1">
-            <a:schemeClr val="accent1"/>
-          </a:lnRef>
-          <a:fillRef idx="3">
-            <a:schemeClr val="accent1"/>
-          </a:fillRef>
-          <a:effectRef idx="2">
-            <a:schemeClr val="accent1"/>
-          </a:effectRef>
-          <a:fontRef idx="minor">
-            <a:schemeClr val="lt1"/>
-          </a:fontRef>
-        </p:style>
-        <p:txBody>
-          <a:bodyPr rtlCol="0" anchor="ctr" wrap="square"/>
-          <a:lstStyle/>
-          <a:p>
-            <a:pPr algn="ctr"/>
-          </a:p>
-        </p:txBody>
-      </p:sp>
-      <p:sp>
-        <p:nvSpPr>
-          <p:cNvPr id="33" name="TextBox 32"/>
-          <p:cNvSpPr txBox="1"/>
-          <p:nvPr/>
-        </p:nvSpPr>
-        <p:spPr>
-          <a:xfrm>
-            <a:off x="1437608" y="6437376"/>
-            <a:ext cx="1562480" cy="152146"/>
-          </a:xfrm>
-          <a:prstGeom prst="rect">
-            <a:avLst/>
-          </a:prstGeom>
-          <a:noFill/>
-        </p:spPr>
-        <p:txBody>
-          <a:bodyPr wrap="square" anchor="t" lIns="0" rIns="0" tIns="0" bIns="0">
-            <a:spAutoFit/>
-          </a:bodyPr>
-          <a:lstStyle/>
-          <a:p>
-            <a:pPr algn="l"/>
-            <a:r>
-              <a:rPr sz="700" b="1" i="0">
-                <a:solidFill>
-                  <a:srgbClr val="5B3FD6"/>
-                </a:solidFill>
-                <a:latin typeface="Calibri"/>
-              </a:rPr>
-              <a:t>Round 1. Real, or the wobble</a:t>
-            </a:r>
-          </a:p>
-        </p:txBody>
-      </p:sp>
-      <p:sp>
-        <p:nvSpPr>
-          <p:cNvPr id="34" name="Oval 33"/>
-          <p:cNvSpPr/>
-          <p:nvPr/>
-        </p:nvSpPr>
-        <p:spPr>
-          <a:xfrm>
-            <a:off x="3091529" y="6492240"/>
-            <a:ext cx="64008" cy="64008"/>
-          </a:xfrm>
-          <a:prstGeom prst="ellipse">
-            <a:avLst/>
-          </a:prstGeom>
-          <a:solidFill>
-            <a:srgbClr val="CFC9EE"/>
-          </a:solidFill>
-          <a:ln>
-            <a:noFill/>
-          </a:ln>
-          <a:effectLst/>
-        </p:spPr>
-        <p:style>
-          <a:lnRef idx="1">
-            <a:schemeClr val="accent1"/>
-          </a:lnRef>
-          <a:fillRef idx="3">
-            <a:schemeClr val="accent1"/>
-          </a:fillRef>
-          <a:effectRef idx="2">
-            <a:schemeClr val="accent1"/>
-          </a:effectRef>
-          <a:fontRef idx="minor">
-            <a:schemeClr val="lt1"/>
-          </a:fontRef>
-        </p:style>
-        <p:txBody>
-          <a:bodyPr rtlCol="0" anchor="ctr" wrap="square"/>
-          <a:lstStyle/>
-          <a:p>
-            <a:pPr algn="ctr"/>
-          </a:p>
-        </p:txBody>
-      </p:sp>
-      <p:sp>
-        <p:nvSpPr>
-          <p:cNvPr id="35" name="TextBox 34"/>
-          <p:cNvSpPr txBox="1"/>
-          <p:nvPr/>
-        </p:nvSpPr>
-        <p:spPr>
-          <a:xfrm>
-            <a:off x="3201257" y="6437376"/>
-            <a:ext cx="1378457" cy="152146"/>
-          </a:xfrm>
-          <a:prstGeom prst="rect">
-            <a:avLst/>
-          </a:prstGeom>
-          <a:noFill/>
-        </p:spPr>
-        <p:txBody>
-          <a:bodyPr wrap="square" anchor="t" lIns="0" rIns="0" tIns="0" bIns="0">
-            <a:spAutoFit/>
-          </a:bodyPr>
-          <a:lstStyle/>
-          <a:p>
-            <a:pPr algn="l"/>
-            <a:r>
-              <a:rPr sz="700" b="0" i="0">
-                <a:solidFill>
-                  <a:srgbClr val="6B6690"/>
-                </a:solidFill>
-                <a:latin typeface="Calibri"/>
-              </a:rPr>
-              <a:t>Round 2. Worth acting on</a:t>
-            </a:r>
-          </a:p>
-        </p:txBody>
-      </p:sp>
-      <p:sp>
-        <p:nvSpPr>
-          <p:cNvPr id="36" name="Oval 35"/>
-          <p:cNvSpPr/>
-          <p:nvPr/>
-        </p:nvSpPr>
-        <p:spPr>
-          <a:xfrm>
-            <a:off x="4671155" y="6492240"/>
-            <a:ext cx="64008" cy="64008"/>
-          </a:xfrm>
-          <a:prstGeom prst="ellipse">
-            <a:avLst/>
-          </a:prstGeom>
-          <a:solidFill>
-            <a:srgbClr val="CFC9EE"/>
-          </a:solidFill>
-          <a:ln>
-            <a:noFill/>
-          </a:ln>
-          <a:effectLst/>
-        </p:spPr>
-        <p:style>
-          <a:lnRef idx="1">
-            <a:schemeClr val="accent1"/>
-          </a:lnRef>
-          <a:fillRef idx="3">
-            <a:schemeClr val="accent1"/>
-          </a:fillRef>
-          <a:effectRef idx="2">
-            <a:schemeClr val="accent1"/>
-          </a:effectRef>
-          <a:fontRef idx="minor">
-            <a:schemeClr val="lt1"/>
-          </a:fontRef>
-        </p:style>
-        <p:txBody>
-          <a:bodyPr rtlCol="0" anchor="ctr" wrap="square"/>
-          <a:lstStyle/>
-          <a:p>
-            <a:pPr algn="ctr"/>
-          </a:p>
-        </p:txBody>
-      </p:sp>
-      <p:sp>
-        <p:nvSpPr>
-          <p:cNvPr id="37" name="TextBox 36"/>
-          <p:cNvSpPr txBox="1"/>
-          <p:nvPr/>
-        </p:nvSpPr>
-        <p:spPr>
-          <a:xfrm>
-            <a:off x="4780883" y="6437376"/>
-            <a:ext cx="1930527" cy="152146"/>
-          </a:xfrm>
-          <a:prstGeom prst="rect">
-            <a:avLst/>
-          </a:prstGeom>
-          <a:noFill/>
-        </p:spPr>
-        <p:txBody>
-          <a:bodyPr wrap="square" anchor="t" lIns="0" rIns="0" tIns="0" bIns="0">
-            <a:spAutoFit/>
-          </a:bodyPr>
-          <a:lstStyle/>
-          <a:p>
-            <a:pPr algn="l"/>
-            <a:r>
-              <a:rPr sz="700" b="0" i="0">
-                <a:solidFill>
-                  <a:srgbClr val="6B6690"/>
-                </a:solidFill>
-                <a:latin typeface="Calibri"/>
-              </a:rPr>
-              <a:t>Round 3. The count behind 40 percent</a:t>
-            </a:r>
-          </a:p>
-        </p:txBody>
-      </p:sp>
-      <p:sp>
-        <p:nvSpPr>
-          <p:cNvPr id="38" name="TextBox 37"/>
-          <p:cNvSpPr txBox="1"/>
-          <p:nvPr/>
-        </p:nvSpPr>
-        <p:spPr>
-          <a:xfrm>
-            <a:off x="10198303" y="6437376"/>
-            <a:ext cx="1463040" cy="160401"/>
-          </a:xfrm>
-          <a:prstGeom prst="rect">
-            <a:avLst/>
-          </a:prstGeom>
-          <a:noFill/>
-        </p:spPr>
-        <p:txBody>
-          <a:bodyPr wrap="square" anchor="t" lIns="0" rIns="0" tIns="0" bIns="0">
-            <a:spAutoFit/>
-          </a:bodyPr>
-          <a:lstStyle/>
-          <a:p>
-            <a:pPr algn="r"/>
-            <a:r>
-              <a:rPr sz="750" b="0" i="0">
-                <a:solidFill>
-                  <a:srgbClr val="6B6690"/>
-                </a:solidFill>
-                <a:latin typeface="Calibri"/>
-              </a:rPr>
               <a:t>S16  ·  19 / 44</a:t>
             </a:r>
           </a:p>
@@ -17606,7 +17621,7 @@
                 </a:solidFill>
                 <a:latin typeface="Calibri"/>
               </a:rPr>
-              <a:t>Week 1 Day 4: real, worth it, and caused?</a:t>
+              <a:t>Week 1, Day 4. Real, or the usual wobble?</a:t>
             </a:r>
           </a:p>
         </p:txBody>
@@ -19146,7 +19161,7 @@
                 </a:solidFill>
                 <a:latin typeface="Calibri"/>
               </a:rPr>
-              <a:t>Week 1 Day 4: real, worth it, and caused?</a:t>
+              <a:t>Week 1, Day 4. Real, or the usual wobble?</a:t>
             </a:r>
           </a:p>
         </p:txBody>
@@ -21682,14 +21697,14 @@
                 </a:solidFill>
                 <a:latin typeface="Calibri"/>
               </a:rPr>
-              <a:t>The draft ranks Retail-Plus first because its p-value is the smallest on the page.</a:t>
+              <a:t>The draft ranks Retail-Plus first because the room's own p-value is the smallest on the page.</a:t>
             </a:r>
           </a:p>
         </p:txBody>
       </p:sp>
       <p:pic>
         <p:nvPicPr>
-          <p:cNvPr id="9" name="mermaid diagram" descr="c1625a15d5586065.png"/>
+          <p:cNvPr id="9" name="mermaid diagram" descr="b50dc4998ea915b9.png"/>
           <p:cNvPicPr>
             <a:picLocks noChangeAspect="1"/>
           </p:cNvPicPr>
@@ -24791,7 +24806,7 @@
       </p:sp>
       <p:pic>
         <p:nvPicPr>
-          <p:cNvPr id="9" name="mermaid diagram" descr="1d9c244cae2f94d3.png"/>
+          <p:cNvPr id="9" name="mermaid diagram" descr="7622c699aa10bf66.png"/>
           <p:cNvPicPr>
             <a:picLocks noChangeAspect="1"/>
           </p:cNvPicPr>
@@ -24842,7 +24857,7 @@
                 </a:solidFill>
                 <a:latin typeface="Calibri"/>
               </a:rPr>
-              <a:t>The consumer bars are too small to see at this scale, which is itself the finding: size every consumer gap against a quarter that Business dominates.</a:t>
+              <a:t>Business delivered Rs 1,27,64,460 in the same quarter, about 268 times Retail-Plus, so on this axis its bar would stand 268 times as tall. Size every consumer gap against a quarter that Business dominates.</a:t>
             </a:r>
           </a:p>
         </p:txBody>
@@ -30990,7 +31005,7 @@
                 </a:solidFill>
                 <a:latin typeface="Calibri"/>
               </a:rPr>
-              <a:t>Week 1 Day 4: real, worth it, and caused?</a:t>
+              <a:t>Week 1, Day 4. Real, or the usual wobble?</a:t>
             </a:r>
           </a:p>
         </p:txBody>
@@ -45822,7 +45837,7 @@
                 </a:solidFill>
                 <a:latin typeface="Calibri"/>
               </a:rPr>
-              <a:t>Week 1 Day 4: real, worth it, and caused?</a:t>
+              <a:t>Week 1, Day 4. Real, or the usual wobble?</a:t>
             </a:r>
           </a:p>
         </p:txBody>
